--- a/docs/pitch/TheAgentOrg-prefinal.pptx
+++ b/docs/pitch/TheAgentOrg-prefinal.pptx
@@ -20,6 +20,7 @@
     <p:sldId id="268" r:id="rId19"/>
     <p:sldId id="269" r:id="rId20"/>
     <p:sldId id="270" r:id="rId21"/>
+    <p:sldId id="271" r:id="rId22"/>
   </p:sldIdLst>
   <p:sldSz cx="12191695" cy="6858000" type="screen4x3"/>
   <p:notesSz cx="6858000" cy="9144000"/>
@@ -3521,7 +3522,7 @@
                 </a:solidFill>
                 <a:latin typeface="Helvetica Neue"/>
               </a:rPr>
-              <a:t>PROGRESS</a:t>
+              <a:t>ARCHITECTURE</a:t>
             </a:r>
           </a:p>
         </p:txBody>
@@ -3560,7 +3561,7 @@
                 </a:solidFill>
                 <a:latin typeface="Helvetica Neue"/>
               </a:rPr>
-              <a:t>Working today, end to end</a:t>
+              <a:t>The humans are not a formality</a:t>
             </a:r>
           </a:p>
         </p:txBody>
@@ -3617,8 +3618,8 @@
         </p:nvSpPr>
         <p:spPr>
           <a:xfrm>
-            <a:off x="1005840" y="2286000"/>
-            <a:ext cx="5669280" cy="914400"/>
+            <a:off x="1005840" y="2560320"/>
+            <a:ext cx="10149840" cy="914400"/>
           </a:xfrm>
           <a:prstGeom prst="rect">
             <a:avLst/>
@@ -3637,13 +3638,13 @@
               </a:lnSpc>
             </a:pPr>
             <a:r>
-              <a:rPr sz="2000" b="0">
+              <a:rPr sz="2100" b="0">
                 <a:solidFill>
                   <a:srgbClr val="E8EDF4"/>
                 </a:solidFill>
                 <a:latin typeface="Helvetica Neue"/>
               </a:rPr>
-              <a:t>The full pipeline runs in the cloud on every ticket.</a:t>
+              <a:t>Each gate is a platform-level approval, not a step the pipeline can skip.</a:t>
             </a:r>
           </a:p>
         </p:txBody>
@@ -3656,8 +3657,8 @@
         </p:nvSpPr>
         <p:spPr>
           <a:xfrm>
-            <a:off x="1005840" y="2962656"/>
-            <a:ext cx="5669280" cy="914400"/>
+            <a:off x="1005840" y="3328416"/>
+            <a:ext cx="10149840" cy="914400"/>
           </a:xfrm>
           <a:prstGeom prst="rect">
             <a:avLst/>
@@ -3676,13 +3677,13 @@
               </a:lnSpc>
             </a:pPr>
             <a:r>
-              <a:rPr sz="2000" b="0">
+              <a:rPr sz="2100" b="0">
                 <a:solidFill>
                   <a:srgbClr val="E8EDF4"/>
                 </a:solidFill>
                 <a:latin typeface="Helvetica Neue"/>
               </a:rPr>
-              <a:t>Three real scanners run inside the agents' own environment.</a:t>
+              <a:t>Until someone clicks, the next stage does not exist — it is never queued.</a:t>
             </a:r>
           </a:p>
         </p:txBody>
@@ -3695,8 +3696,8 @@
         </p:nvSpPr>
         <p:spPr>
           <a:xfrm>
-            <a:off x="1005840" y="3639312"/>
-            <a:ext cx="5669280" cy="914400"/>
+            <a:off x="1005840" y="4096512"/>
+            <a:ext cx="10149840" cy="914400"/>
           </a:xfrm>
           <a:prstGeom prst="rect">
             <a:avLst/>
@@ -3715,13 +3716,13 @@
               </a:lnSpc>
             </a:pPr>
             <a:r>
-              <a:rPr sz="2000" b="0">
+              <a:rPr sz="2100" b="0">
                 <a:solidFill>
                   <a:srgbClr val="E8EDF4"/>
                 </a:solidFill>
                 <a:latin typeface="Helvetica Neue"/>
               </a:rPr>
-              <a:t>Both outcomes verified this week against the live system.</a:t>
+              <a:t>Refusing is recorded on the ticket: who refused, and when.</a:t>
             </a:r>
           </a:p>
         </p:txBody>
@@ -3734,8 +3735,8 @@
         </p:nvSpPr>
         <p:spPr>
           <a:xfrm>
-            <a:off x="1005840" y="4315967"/>
-            <a:ext cx="5669280" cy="914400"/>
+            <a:off x="1005840" y="5029200"/>
+            <a:ext cx="9784080" cy="914400"/>
           </a:xfrm>
           <a:prstGeom prst="rect">
             <a:avLst/>
@@ -3754,27 +3755,357 @@
               </a:lnSpc>
             </a:pPr>
             <a:r>
-              <a:rPr sz="2000" b="0">
-                <a:solidFill>
-                  <a:srgbClr val="E8EDF4"/>
-                </a:solidFill>
-                <a:latin typeface="Helvetica Neue"/>
-              </a:rPr>
-              <a:t>Every run leaves a readable record on the ticket it came from.</a:t>
-            </a:r>
-          </a:p>
-        </p:txBody>
-      </p:sp>
-      <p:sp>
-        <p:nvSpPr>
-          <p:cNvPr id="10" name="TextBox 9"/>
+              <a:rPr sz="1900" b="0">
+                <a:solidFill>
+                  <a:srgbClr val="4FD1C5"/>
+                </a:solidFill>
+                <a:latin typeface="Helvetica Neue"/>
+              </a:rPr>
+              <a:t>When the safety check stops a change, the stages after it are never created. There is no branch to take and no flag to flip — the refusal is structural.</a:t>
+            </a:r>
+          </a:p>
+        </p:txBody>
+      </p:sp>
+      <p:sp>
+        <p:nvSpPr>
+          <p:cNvPr id="45" name="TextBox 44"/>
           <p:cNvSpPr txBox="1"/>
           <p:nvPr/>
         </p:nvSpPr>
         <p:spPr>
           <a:xfrm>
-            <a:off x="7315200" y="2286000"/>
-            <a:ext cx="3108960" cy="868680"/>
+            <a:off x="11247120" y="6272784"/>
+            <a:ext cx="548640" cy="292608"/>
+          </a:xfrm>
+          <a:prstGeom prst="rect">
+            <a:avLst/>
+          </a:prstGeom>
+          <a:noFill/>
+        </p:spPr>
+        <p:txBody>
+          <a:bodyPr wrap="square">
+            <a:spAutoFit/>
+          </a:bodyPr>
+          <a:lstStyle/>
+          <a:p>
+            <a:pPr algn="r">
+              <a:lnSpc>
+                <a:spcPct val="120000"/>
+              </a:lnSpc>
+            </a:pPr>
+            <a:r>
+              <a:rPr sz="1100" b="0">
+                <a:solidFill>
+                  <a:srgbClr val="8A94A6"/>
+                </a:solidFill>
+                <a:latin typeface="Helvetica Neue"/>
+              </a:rPr>
+              <a:t>10</a:t>
+            </a:r>
+          </a:p>
+        </p:txBody>
+      </p:sp>
+    </p:spTree>
+  </p:cSld>
+  <p:clrMapOvr>
+    <a:masterClrMapping/>
+  </p:clrMapOvr>
+  <p:transition spd="med">
+    <p:wipe dir="l"/>
+  </p:transition>
+  <p:timing>
+    <p:tnLst>
+      <p:par>
+        <p:cTn id="1" dur="indefinite" restart="never" nodeType="tmRoot">
+          <p:childTnLst>
+            <p:seq concurrent="1" nextAc="seek">
+              <p:cTn id="2" dur="indefinite" nodeType="mainSeq">
+                <p:childTnLst>
+                  <p:par>
+                    <p:cTn id="10" fill="hold">
+                      <p:stCondLst>
+                        <p:cond delay="indefinite"/>
+                      </p:stCondLst>
+                      <p:childTnLst>
+                        <p:par>
+                          <p:cTn id="11" fill="hold">
+                            <p:stCondLst>
+                              <p:cond delay="0"/>
+                            </p:stCondLst>
+                            <p:childTnLst>
+                              <p:par>
+                                <p:cTn id="12" presetID="10" presetClass="entr" presetSubtype="0" fill="hold" grpId="0" nodeType="clickEffect">
+                                  <p:stCondLst>
+                                    <p:cond delay="0"/>
+                                  </p:stCondLst>
+                                  <p:childTnLst>
+                                    <p:set>
+                                      <p:cBhvr>
+                                        <p:cTn id="13" dur="1" fill="hold"/>
+                                        <p:tgtEl>
+                                          <p:spTgt spid="6"/>
+                                        </p:tgtEl>
+                                        <p:attrNameLst>
+                                          <p:attrName>style.visibility</p:attrName>
+                                        </p:attrNameLst>
+                                      </p:cBhvr>
+                                      <p:to>
+                                        <p:strVal val="visible"/>
+                                      </p:to>
+                                    </p:set>
+                                    <p:animEffect transition="in" filter="fade">
+                                      <p:cBhvr>
+                                        <p:cTn id="14" dur="450"/>
+                                        <p:tgtEl>
+                                          <p:spTgt spid="6"/>
+                                        </p:tgtEl>
+                                      </p:cBhvr>
+                                    </p:animEffect>
+                                  </p:childTnLst>
+                                </p:cTn>
+                              </p:par>
+                            </p:childTnLst>
+                          </p:cTn>
+                        </p:par>
+                      </p:childTnLst>
+                    </p:cTn>
+                  </p:par>
+                  <p:par>
+                    <p:cTn id="20" fill="hold">
+                      <p:stCondLst>
+                        <p:cond delay="indefinite"/>
+                      </p:stCondLst>
+                      <p:childTnLst>
+                        <p:par>
+                          <p:cTn id="21" fill="hold">
+                            <p:stCondLst>
+                              <p:cond delay="0"/>
+                            </p:stCondLst>
+                            <p:childTnLst>
+                              <p:par>
+                                <p:cTn id="22" presetID="10" presetClass="entr" presetSubtype="0" fill="hold" grpId="0" nodeType="afterEffect">
+                                  <p:stCondLst>
+                                    <p:cond delay="0"/>
+                                  </p:stCondLst>
+                                  <p:childTnLst>
+                                    <p:set>
+                                      <p:cBhvr>
+                                        <p:cTn id="23" dur="1" fill="hold"/>
+                                        <p:tgtEl>
+                                          <p:spTgt spid="7"/>
+                                        </p:tgtEl>
+                                        <p:attrNameLst>
+                                          <p:attrName>style.visibility</p:attrName>
+                                        </p:attrNameLst>
+                                      </p:cBhvr>
+                                      <p:to>
+                                        <p:strVal val="visible"/>
+                                      </p:to>
+                                    </p:set>
+                                    <p:animEffect transition="in" filter="fade">
+                                      <p:cBhvr>
+                                        <p:cTn id="24" dur="450"/>
+                                        <p:tgtEl>
+                                          <p:spTgt spid="7"/>
+                                        </p:tgtEl>
+                                      </p:cBhvr>
+                                    </p:animEffect>
+                                  </p:childTnLst>
+                                </p:cTn>
+                              </p:par>
+                            </p:childTnLst>
+                          </p:cTn>
+                        </p:par>
+                      </p:childTnLst>
+                    </p:cTn>
+                  </p:par>
+                  <p:par>
+                    <p:cTn id="30" fill="hold">
+                      <p:stCondLst>
+                        <p:cond delay="indefinite"/>
+                      </p:stCondLst>
+                      <p:childTnLst>
+                        <p:par>
+                          <p:cTn id="31" fill="hold">
+                            <p:stCondLst>
+                              <p:cond delay="0"/>
+                            </p:stCondLst>
+                            <p:childTnLst>
+                              <p:par>
+                                <p:cTn id="32" presetID="10" presetClass="entr" presetSubtype="0" fill="hold" grpId="0" nodeType="afterEffect">
+                                  <p:stCondLst>
+                                    <p:cond delay="0"/>
+                                  </p:stCondLst>
+                                  <p:childTnLst>
+                                    <p:set>
+                                      <p:cBhvr>
+                                        <p:cTn id="33" dur="1" fill="hold"/>
+                                        <p:tgtEl>
+                                          <p:spTgt spid="8"/>
+                                        </p:tgtEl>
+                                        <p:attrNameLst>
+                                          <p:attrName>style.visibility</p:attrName>
+                                        </p:attrNameLst>
+                                      </p:cBhvr>
+                                      <p:to>
+                                        <p:strVal val="visible"/>
+                                      </p:to>
+                                    </p:set>
+                                    <p:animEffect transition="in" filter="fade">
+                                      <p:cBhvr>
+                                        <p:cTn id="34" dur="450"/>
+                                        <p:tgtEl>
+                                          <p:spTgt spid="8"/>
+                                        </p:tgtEl>
+                                      </p:cBhvr>
+                                    </p:animEffect>
+                                  </p:childTnLst>
+                                </p:cTn>
+                              </p:par>
+                            </p:childTnLst>
+                          </p:cTn>
+                        </p:par>
+                      </p:childTnLst>
+                    </p:cTn>
+                  </p:par>
+                  <p:par>
+                    <p:cTn id="40" fill="hold">
+                      <p:stCondLst>
+                        <p:cond delay="indefinite"/>
+                      </p:stCondLst>
+                      <p:childTnLst>
+                        <p:par>
+                          <p:cTn id="41" fill="hold">
+                            <p:stCondLst>
+                              <p:cond delay="0"/>
+                            </p:stCondLst>
+                            <p:childTnLst>
+                              <p:par>
+                                <p:cTn id="42" presetID="10" presetClass="entr" presetSubtype="0" fill="hold" grpId="0" nodeType="afterEffect">
+                                  <p:stCondLst>
+                                    <p:cond delay="0"/>
+                                  </p:stCondLst>
+                                  <p:childTnLst>
+                                    <p:set>
+                                      <p:cBhvr>
+                                        <p:cTn id="43" dur="1" fill="hold"/>
+                                        <p:tgtEl>
+                                          <p:spTgt spid="9"/>
+                                        </p:tgtEl>
+                                        <p:attrNameLst>
+                                          <p:attrName>style.visibility</p:attrName>
+                                        </p:attrNameLst>
+                                      </p:cBhvr>
+                                      <p:to>
+                                        <p:strVal val="visible"/>
+                                      </p:to>
+                                    </p:set>
+                                    <p:animEffect transition="in" filter="fade">
+                                      <p:cBhvr>
+                                        <p:cTn id="44" dur="450"/>
+                                        <p:tgtEl>
+                                          <p:spTgt spid="9"/>
+                                        </p:tgtEl>
+                                      </p:cBhvr>
+                                    </p:animEffect>
+                                  </p:childTnLst>
+                                </p:cTn>
+                              </p:par>
+                            </p:childTnLst>
+                          </p:cTn>
+                        </p:par>
+                      </p:childTnLst>
+                    </p:cTn>
+                  </p:par>
+                </p:childTnLst>
+              </p:cTn>
+              <p:prevCondLst>
+                <p:cond evt="onPrev" delay="0">
+                  <p:tgtEl>
+                    <p:sldTgt/>
+                  </p:tgtEl>
+                </p:cond>
+              </p:prevCondLst>
+              <p:nextCondLst>
+                <p:cond evt="onNext" delay="0">
+                  <p:tgtEl>
+                    <p:sldTgt/>
+                  </p:tgtEl>
+                </p:cond>
+              </p:nextCondLst>
+            </p:seq>
+          </p:childTnLst>
+        </p:cTn>
+      </p:par>
+    </p:tnLst>
+  </p:timing>
+</p:sld>
+</file>
+
+<file path=ppt/slides/slide11.xml><?xml version="1.0" encoding="utf-8"?>
+<p:sld xmlns:a="http://schemas.openxmlformats.org/drawingml/2006/main" xmlns:p="http://schemas.openxmlformats.org/presentationml/2006/main" xmlns:r="http://schemas.openxmlformats.org/officeDocument/2006/relationships">
+  <p:cSld>
+    <p:spTree>
+      <p:nvGrpSpPr>
+        <p:cNvPr id="1" name=""/>
+        <p:cNvGrpSpPr/>
+        <p:nvPr/>
+      </p:nvGrpSpPr>
+      <p:grpSpPr/>
+      <p:sp>
+        <p:nvSpPr>
+          <p:cNvPr id="2" name="Rectangle 1"/>
+          <p:cNvSpPr/>
+          <p:nvPr/>
+        </p:nvSpPr>
+        <p:spPr>
+          <a:xfrm>
+            <a:off x="0" y="0"/>
+            <a:ext cx="12191695" cy="6858000"/>
+          </a:xfrm>
+          <a:prstGeom prst="rect">
+            <a:avLst/>
+          </a:prstGeom>
+          <a:solidFill>
+            <a:srgbClr val="14181F"/>
+          </a:solidFill>
+          <a:ln>
+            <a:noFill/>
+          </a:ln>
+          <a:effectLst/>
+        </p:spPr>
+        <p:style>
+          <a:lnRef idx="1">
+            <a:schemeClr val="accent1"/>
+          </a:lnRef>
+          <a:fillRef idx="3">
+            <a:schemeClr val="accent1"/>
+          </a:fillRef>
+          <a:effectRef idx="2">
+            <a:schemeClr val="accent1"/>
+          </a:effectRef>
+          <a:fontRef idx="minor">
+            <a:schemeClr val="lt1"/>
+          </a:fontRef>
+        </p:style>
+        <p:txBody>
+          <a:bodyPr rtlCol="0" anchor="ctr"/>
+          <a:lstStyle/>
+          <a:p>
+            <a:pPr algn="ctr"/>
+          </a:p>
+        </p:txBody>
+      </p:sp>
+      <p:sp>
+        <p:nvSpPr>
+          <p:cNvPr id="3" name="TextBox 2"/>
+          <p:cNvSpPr txBox="1"/>
+          <p:nvPr/>
+        </p:nvSpPr>
+        <p:spPr>
+          <a:xfrm>
+            <a:off x="1005840" y="658368"/>
+            <a:ext cx="10149840" cy="292608"/>
           </a:xfrm>
           <a:prstGeom prst="rect">
             <a:avLst/>
@@ -3793,6 +4124,284 @@
               </a:lnSpc>
             </a:pPr>
             <a:r>
+              <a:rPr sz="1200" b="1">
+                <a:solidFill>
+                  <a:srgbClr val="4FD1C5"/>
+                </a:solidFill>
+                <a:latin typeface="Helvetica Neue"/>
+              </a:rPr>
+              <a:t>PROGRESS</a:t>
+            </a:r>
+          </a:p>
+        </p:txBody>
+      </p:sp>
+      <p:sp>
+        <p:nvSpPr>
+          <p:cNvPr id="4" name="TextBox 3"/>
+          <p:cNvSpPr txBox="1"/>
+          <p:nvPr/>
+        </p:nvSpPr>
+        <p:spPr>
+          <a:xfrm>
+            <a:off x="1005840" y="1078992"/>
+            <a:ext cx="10149840" cy="914400"/>
+          </a:xfrm>
+          <a:prstGeom prst="rect">
+            <a:avLst/>
+          </a:prstGeom>
+          <a:noFill/>
+        </p:spPr>
+        <p:txBody>
+          <a:bodyPr wrap="square">
+            <a:spAutoFit/>
+          </a:bodyPr>
+          <a:lstStyle/>
+          <a:p>
+            <a:pPr algn="l">
+              <a:lnSpc>
+                <a:spcPct val="106000"/>
+              </a:lnSpc>
+            </a:pPr>
+            <a:r>
+              <a:rPr sz="3800" b="1">
+                <a:solidFill>
+                  <a:srgbClr val="E8EDF4"/>
+                </a:solidFill>
+                <a:latin typeface="Helvetica Neue"/>
+              </a:rPr>
+              <a:t>Working today, end to end</a:t>
+            </a:r>
+          </a:p>
+        </p:txBody>
+      </p:sp>
+      <p:sp>
+        <p:nvSpPr>
+          <p:cNvPr id="5" name="Rectangle 4"/>
+          <p:cNvSpPr/>
+          <p:nvPr/>
+        </p:nvSpPr>
+        <p:spPr>
+          <a:xfrm>
+            <a:off x="1005840" y="1920239"/>
+            <a:ext cx="1463040" cy="38100"/>
+          </a:xfrm>
+          <a:prstGeom prst="rect">
+            <a:avLst/>
+          </a:prstGeom>
+          <a:solidFill>
+            <a:srgbClr val="4FD1C5"/>
+          </a:solidFill>
+          <a:ln>
+            <a:noFill/>
+          </a:ln>
+          <a:effectLst/>
+        </p:spPr>
+        <p:style>
+          <a:lnRef idx="1">
+            <a:schemeClr val="accent1"/>
+          </a:lnRef>
+          <a:fillRef idx="3">
+            <a:schemeClr val="accent1"/>
+          </a:fillRef>
+          <a:effectRef idx="2">
+            <a:schemeClr val="accent1"/>
+          </a:effectRef>
+          <a:fontRef idx="minor">
+            <a:schemeClr val="lt1"/>
+          </a:fontRef>
+        </p:style>
+        <p:txBody>
+          <a:bodyPr rtlCol="0" anchor="ctr"/>
+          <a:lstStyle/>
+          <a:p>
+            <a:pPr algn="ctr"/>
+          </a:p>
+        </p:txBody>
+      </p:sp>
+      <p:sp>
+        <p:nvSpPr>
+          <p:cNvPr id="6" name="TextBox 5"/>
+          <p:cNvSpPr txBox="1"/>
+          <p:nvPr/>
+        </p:nvSpPr>
+        <p:spPr>
+          <a:xfrm>
+            <a:off x="1005840" y="2286000"/>
+            <a:ext cx="5669280" cy="914400"/>
+          </a:xfrm>
+          <a:prstGeom prst="rect">
+            <a:avLst/>
+          </a:prstGeom>
+          <a:noFill/>
+        </p:spPr>
+        <p:txBody>
+          <a:bodyPr wrap="square">
+            <a:spAutoFit/>
+          </a:bodyPr>
+          <a:lstStyle/>
+          <a:p>
+            <a:pPr algn="l">
+              <a:lnSpc>
+                <a:spcPct val="120000"/>
+              </a:lnSpc>
+            </a:pPr>
+            <a:r>
+              <a:rPr sz="2000" b="0">
+                <a:solidFill>
+                  <a:srgbClr val="E8EDF4"/>
+                </a:solidFill>
+                <a:latin typeface="Helvetica Neue"/>
+              </a:rPr>
+              <a:t>The full pipeline runs in the cloud on every ticket.</a:t>
+            </a:r>
+          </a:p>
+        </p:txBody>
+      </p:sp>
+      <p:sp>
+        <p:nvSpPr>
+          <p:cNvPr id="7" name="TextBox 6"/>
+          <p:cNvSpPr txBox="1"/>
+          <p:nvPr/>
+        </p:nvSpPr>
+        <p:spPr>
+          <a:xfrm>
+            <a:off x="1005840" y="2962656"/>
+            <a:ext cx="5669280" cy="914400"/>
+          </a:xfrm>
+          <a:prstGeom prst="rect">
+            <a:avLst/>
+          </a:prstGeom>
+          <a:noFill/>
+        </p:spPr>
+        <p:txBody>
+          <a:bodyPr wrap="square">
+            <a:spAutoFit/>
+          </a:bodyPr>
+          <a:lstStyle/>
+          <a:p>
+            <a:pPr algn="l">
+              <a:lnSpc>
+                <a:spcPct val="120000"/>
+              </a:lnSpc>
+            </a:pPr>
+            <a:r>
+              <a:rPr sz="2000" b="0">
+                <a:solidFill>
+                  <a:srgbClr val="E8EDF4"/>
+                </a:solidFill>
+                <a:latin typeface="Helvetica Neue"/>
+              </a:rPr>
+              <a:t>Three real scanners run inside the agents' own environment.</a:t>
+            </a:r>
+          </a:p>
+        </p:txBody>
+      </p:sp>
+      <p:sp>
+        <p:nvSpPr>
+          <p:cNvPr id="8" name="TextBox 7"/>
+          <p:cNvSpPr txBox="1"/>
+          <p:nvPr/>
+        </p:nvSpPr>
+        <p:spPr>
+          <a:xfrm>
+            <a:off x="1005840" y="3639312"/>
+            <a:ext cx="5669280" cy="914400"/>
+          </a:xfrm>
+          <a:prstGeom prst="rect">
+            <a:avLst/>
+          </a:prstGeom>
+          <a:noFill/>
+        </p:spPr>
+        <p:txBody>
+          <a:bodyPr wrap="square">
+            <a:spAutoFit/>
+          </a:bodyPr>
+          <a:lstStyle/>
+          <a:p>
+            <a:pPr algn="l">
+              <a:lnSpc>
+                <a:spcPct val="120000"/>
+              </a:lnSpc>
+            </a:pPr>
+            <a:r>
+              <a:rPr sz="2000" b="0">
+                <a:solidFill>
+                  <a:srgbClr val="E8EDF4"/>
+                </a:solidFill>
+                <a:latin typeface="Helvetica Neue"/>
+              </a:rPr>
+              <a:t>Both outcomes verified this week against the live system.</a:t>
+            </a:r>
+          </a:p>
+        </p:txBody>
+      </p:sp>
+      <p:sp>
+        <p:nvSpPr>
+          <p:cNvPr id="9" name="TextBox 8"/>
+          <p:cNvSpPr txBox="1"/>
+          <p:nvPr/>
+        </p:nvSpPr>
+        <p:spPr>
+          <a:xfrm>
+            <a:off x="1005840" y="4315967"/>
+            <a:ext cx="5669280" cy="914400"/>
+          </a:xfrm>
+          <a:prstGeom prst="rect">
+            <a:avLst/>
+          </a:prstGeom>
+          <a:noFill/>
+        </p:spPr>
+        <p:txBody>
+          <a:bodyPr wrap="square">
+            <a:spAutoFit/>
+          </a:bodyPr>
+          <a:lstStyle/>
+          <a:p>
+            <a:pPr algn="l">
+              <a:lnSpc>
+                <a:spcPct val="120000"/>
+              </a:lnSpc>
+            </a:pPr>
+            <a:r>
+              <a:rPr sz="2000" b="0">
+                <a:solidFill>
+                  <a:srgbClr val="E8EDF4"/>
+                </a:solidFill>
+                <a:latin typeface="Helvetica Neue"/>
+              </a:rPr>
+              <a:t>Every run leaves a readable record on the ticket it came from.</a:t>
+            </a:r>
+          </a:p>
+        </p:txBody>
+      </p:sp>
+      <p:sp>
+        <p:nvSpPr>
+          <p:cNvPr id="10" name="TextBox 9"/>
+          <p:cNvSpPr txBox="1"/>
+          <p:nvPr/>
+        </p:nvSpPr>
+        <p:spPr>
+          <a:xfrm>
+            <a:off x="7315200" y="2286000"/>
+            <a:ext cx="3108960" cy="868680"/>
+          </a:xfrm>
+          <a:prstGeom prst="rect">
+            <a:avLst/>
+          </a:prstGeom>
+          <a:noFill/>
+        </p:spPr>
+        <p:txBody>
+          <a:bodyPr wrap="square">
+            <a:spAutoFit/>
+          </a:bodyPr>
+          <a:lstStyle/>
+          <a:p>
+            <a:pPr algn="l">
+              <a:lnSpc>
+                <a:spcPct val="100000"/>
+              </a:lnSpc>
+            </a:pPr>
+            <a:r>
               <a:rPr sz="4200" b="1">
                 <a:solidFill>
                   <a:srgbClr val="E8EDF4"/>
@@ -3987,7 +4596,7 @@
                 </a:solidFill>
                 <a:latin typeface="Helvetica Neue"/>
               </a:rPr>
-              <a:t>10</a:t>
+              <a:t>11</a:t>
             </a:r>
           </a:p>
         </p:txBody>
@@ -4425,7 +5034,7 @@
 </p:sld>
 </file>
 
-<file path=ppt/slides/slide11.xml><?xml version="1.0" encoding="utf-8"?>
+<file path=ppt/slides/slide12.xml><?xml version="1.0" encoding="utf-8"?>
 <p:sld xmlns:a="http://schemas.openxmlformats.org/drawingml/2006/main" xmlns:p="http://schemas.openxmlformats.org/presentationml/2006/main" xmlns:r="http://schemas.openxmlformats.org/officeDocument/2006/relationships">
   <p:cSld>
     <p:spTree>
@@ -4933,7 +5542,7 @@
                 </a:solidFill>
                 <a:latin typeface="Helvetica Neue"/>
               </a:rPr>
-              <a:t>11</a:t>
+              <a:t>12</a:t>
             </a:r>
           </a:p>
         </p:txBody>
@@ -5224,7 +5833,7 @@
 </p:sld>
 </file>
 
-<file path=ppt/slides/slide12.xml><?xml version="1.0" encoding="utf-8"?>
+<file path=ppt/slides/slide13.xml><?xml version="1.0" encoding="utf-8"?>
 <p:sld xmlns:a="http://schemas.openxmlformats.org/drawingml/2006/main" xmlns:p="http://schemas.openxmlformats.org/presentationml/2006/main" xmlns:r="http://schemas.openxmlformats.org/officeDocument/2006/relationships">
   <p:cSld>
     <p:spTree>
@@ -5634,7 +6243,7 @@
                 </a:solidFill>
                 <a:latin typeface="Helvetica Neue"/>
               </a:rPr>
-              <a:t>12</a:t>
+              <a:t>13</a:t>
             </a:r>
           </a:p>
         </p:txBody>
@@ -5876,7 +6485,7 @@
 </p:sld>
 </file>
 
-<file path=ppt/slides/slide13.xml><?xml version="1.0" encoding="utf-8"?>
+<file path=ppt/slides/slide14.xml><?xml version="1.0" encoding="utf-8"?>
 <p:sld xmlns:a="http://schemas.openxmlformats.org/drawingml/2006/main" xmlns:p="http://schemas.openxmlformats.org/presentationml/2006/main" xmlns:r="http://schemas.openxmlformats.org/officeDocument/2006/relationships">
   <p:cSld>
     <p:spTree>
@@ -6281,7 +6890,7 @@
                 </a:solidFill>
                 <a:latin typeface="Helvetica Neue"/>
               </a:rPr>
-              <a:t>13</a:t>
+              <a:t>14</a:t>
             </a:r>
           </a:p>
         </p:txBody>
@@ -6572,7 +7181,7 @@
 </p:sld>
 </file>
 
-<file path=ppt/slides/slide14.xml><?xml version="1.0" encoding="utf-8"?>
+<file path=ppt/slides/slide15.xml><?xml version="1.0" encoding="utf-8"?>
 <p:sld xmlns:a="http://schemas.openxmlformats.org/drawingml/2006/main" xmlns:p="http://schemas.openxmlformats.org/presentationml/2006/main" xmlns:r="http://schemas.openxmlformats.org/officeDocument/2006/relationships">
   <p:cSld>
     <p:spTree>
@@ -6842,7 +7451,7 @@
                 </a:solidFill>
                 <a:latin typeface="Helvetica Neue"/>
               </a:rPr>
-              <a:t>14</a:t>
+              <a:t>15</a:t>
             </a:r>
           </a:p>
         </p:txBody>
@@ -6858,7 +7467,7 @@
 </p:sld>
 </file>
 
-<file path=ppt/slides/slide15.xml><?xml version="1.0" encoding="utf-8"?>
+<file path=ppt/slides/slide16.xml><?xml version="1.0" encoding="utf-8"?>
 <p:sld xmlns:a="http://schemas.openxmlformats.org/drawingml/2006/main" xmlns:p="http://schemas.openxmlformats.org/presentationml/2006/main" xmlns:r="http://schemas.openxmlformats.org/officeDocument/2006/relationships">
   <p:cSld>
     <p:spTree>
@@ -7183,7 +7792,7 @@
                 </a:solidFill>
                 <a:latin typeface="Helvetica Neue"/>
               </a:rPr>
-              <a:t>15</a:t>
+              <a:t>16</a:t>
             </a:r>
           </a:p>
         </p:txBody>
@@ -12720,13 +13329,13 @@
               </a:lnSpc>
             </a:pPr>
             <a:r>
-              <a:rPr sz="3800" b="1">
+              <a:rPr sz="4000" b="1">
                 <a:solidFill>
                   <a:srgbClr val="E8EDF4"/>
                 </a:solidFill>
                 <a:latin typeface="Helvetica Neue"/>
               </a:rPr>
-              <a:t>Cloud-native, start to finish</a:t>
+              <a:t>What runs where</a:t>
             </a:r>
           </a:p>
         </p:txBody>
@@ -12777,14 +13386,105 @@
       </p:sp>
       <p:sp>
         <p:nvSpPr>
-          <p:cNvPr id="6" name="TextBox 5"/>
+          <p:cNvPr id="6" name="Rounded Rectangle 5"/>
+          <p:cNvSpPr/>
+          <p:nvPr/>
+        </p:nvSpPr>
+        <p:spPr>
+          <a:xfrm>
+            <a:off x="1005840" y="2084831"/>
+            <a:ext cx="3200400" cy="3877056"/>
+          </a:xfrm>
+          <a:prstGeom prst="roundRect">
+            <a:avLst>
+              <a:gd name="adj" fmla="val 3000"/>
+            </a:avLst>
+          </a:prstGeom>
+          <a:noFill/>
+          <a:ln w="12700">
+            <a:solidFill>
+              <a:srgbClr val="2A3242"/>
+            </a:solidFill>
+            <a:prstDash val="sysDash"/>
+          </a:ln>
+          <a:effectLst/>
+        </p:spPr>
+        <p:style>
+          <a:lnRef idx="1">
+            <a:schemeClr val="accent1"/>
+          </a:lnRef>
+          <a:fillRef idx="3">
+            <a:schemeClr val="accent1"/>
+          </a:fillRef>
+          <a:effectRef idx="2">
+            <a:schemeClr val="accent1"/>
+          </a:effectRef>
+          <a:fontRef idx="minor">
+            <a:schemeClr val="lt1"/>
+          </a:fontRef>
+        </p:style>
+        <p:txBody>
+          <a:bodyPr rtlCol="0" anchor="ctr"/>
+          <a:lstStyle/>
+          <a:p>
+            <a:pPr algn="ctr"/>
+          </a:p>
+        </p:txBody>
+      </p:sp>
+      <p:sp>
+        <p:nvSpPr>
+          <p:cNvPr id="7" name="Rectangle 6"/>
+          <p:cNvSpPr/>
+          <p:nvPr/>
+        </p:nvSpPr>
+        <p:spPr>
+          <a:xfrm>
+            <a:off x="1170432" y="1984247"/>
+            <a:ext cx="585216" cy="201168"/>
+          </a:xfrm>
+          <a:prstGeom prst="rect">
+            <a:avLst/>
+          </a:prstGeom>
+          <a:solidFill>
+            <a:srgbClr val="14181F"/>
+          </a:solidFill>
+          <a:ln>
+            <a:noFill/>
+          </a:ln>
+          <a:effectLst/>
+        </p:spPr>
+        <p:style>
+          <a:lnRef idx="1">
+            <a:schemeClr val="accent1"/>
+          </a:lnRef>
+          <a:fillRef idx="3">
+            <a:schemeClr val="accent1"/>
+          </a:fillRef>
+          <a:effectRef idx="2">
+            <a:schemeClr val="accent1"/>
+          </a:effectRef>
+          <a:fontRef idx="minor">
+            <a:schemeClr val="lt1"/>
+          </a:fontRef>
+        </p:style>
+        <p:txBody>
+          <a:bodyPr rtlCol="0" anchor="ctr"/>
+          <a:lstStyle/>
+          <a:p>
+            <a:pPr algn="ctr"/>
+          </a:p>
+        </p:txBody>
+      </p:sp>
+      <p:sp>
+        <p:nvSpPr>
+          <p:cNvPr id="8" name="TextBox 7"/>
           <p:cNvSpPr txBox="1"/>
           <p:nvPr/>
         </p:nvSpPr>
         <p:spPr>
           <a:xfrm>
-            <a:off x="1005840" y="2286000"/>
-            <a:ext cx="457200" cy="457200"/>
+            <a:off x="1207008" y="1956815"/>
+            <a:ext cx="2926080" cy="237744"/>
           </a:xfrm>
           <a:prstGeom prst="rect">
             <a:avLst/>
@@ -12803,27 +13503,427 @@
               </a:lnSpc>
             </a:pPr>
             <a:r>
-              <a:rPr sz="1900" b="1">
+              <a:rPr sz="900" b="1">
+                <a:solidFill>
+                  <a:srgbClr val="8A94A6"/>
+                </a:solidFill>
+                <a:latin typeface="Helvetica Neue"/>
+              </a:rPr>
+              <a:t>GITHUB</a:t>
+            </a:r>
+          </a:p>
+        </p:txBody>
+      </p:sp>
+      <p:sp>
+        <p:nvSpPr>
+          <p:cNvPr id="9" name="Rounded Rectangle 8"/>
+          <p:cNvSpPr/>
+          <p:nvPr/>
+        </p:nvSpPr>
+        <p:spPr>
+          <a:xfrm>
+            <a:off x="1207008" y="2395727"/>
+            <a:ext cx="2798064" cy="566928"/>
+          </a:xfrm>
+          <a:prstGeom prst="roundRect">
+            <a:avLst>
+              <a:gd name="adj" fmla="val 8000"/>
+            </a:avLst>
+          </a:prstGeom>
+          <a:solidFill>
+            <a:srgbClr val="1C2230"/>
+          </a:solidFill>
+          <a:ln w="15875">
+            <a:solidFill>
+              <a:srgbClr val="2A3242"/>
+            </a:solidFill>
+          </a:ln>
+          <a:effectLst/>
+        </p:spPr>
+        <p:style>
+          <a:lnRef idx="1">
+            <a:schemeClr val="accent1"/>
+          </a:lnRef>
+          <a:fillRef idx="3">
+            <a:schemeClr val="accent1"/>
+          </a:fillRef>
+          <a:effectRef idx="2">
+            <a:schemeClr val="accent1"/>
+          </a:effectRef>
+          <a:fontRef idx="minor">
+            <a:schemeClr val="lt1"/>
+          </a:fontRef>
+        </p:style>
+        <p:txBody>
+          <a:bodyPr rtlCol="0" anchor="ctr" wrap="square" lIns="82296" rIns="82296" tIns="27432" bIns="27432"/>
+          <a:lstStyle/>
+          <a:p>
+            <a:pPr algn="l"/>
+            <a:r>
+              <a:rPr sz="1200" b="1">
+                <a:solidFill>
+                  <a:srgbClr val="E8EDF4"/>
+                </a:solidFill>
+                <a:latin typeface="Helvetica Neue"/>
+              </a:rPr>
+              <a:t>auth-service</a:t>
+            </a:r>
+          </a:p>
+          <a:p>
+            <a:pPr algn="l"/>
+            <a:r>
+              <a:rPr sz="900">
+                <a:solidFill>
+                  <a:srgbClr val="8A94A6"/>
+                </a:solidFill>
+                <a:latin typeface="Helvetica Neue"/>
+              </a:rPr>
+              <a:t>the target repo · a ticket is opened here</a:t>
+            </a:r>
+          </a:p>
+        </p:txBody>
+      </p:sp>
+      <p:sp>
+        <p:nvSpPr>
+          <p:cNvPr id="10" name="Rounded Rectangle 9"/>
+          <p:cNvSpPr/>
+          <p:nvPr/>
+        </p:nvSpPr>
+        <p:spPr>
+          <a:xfrm>
+            <a:off x="1207008" y="3072383"/>
+            <a:ext cx="2798064" cy="566928"/>
+          </a:xfrm>
+          <a:prstGeom prst="roundRect">
+            <a:avLst>
+              <a:gd name="adj" fmla="val 8000"/>
+            </a:avLst>
+          </a:prstGeom>
+          <a:solidFill>
+            <a:srgbClr val="1C2230"/>
+          </a:solidFill>
+          <a:ln w="15875">
+            <a:solidFill>
+              <a:srgbClr val="4FD1C5"/>
+            </a:solidFill>
+          </a:ln>
+          <a:effectLst/>
+        </p:spPr>
+        <p:style>
+          <a:lnRef idx="1">
+            <a:schemeClr val="accent1"/>
+          </a:lnRef>
+          <a:fillRef idx="3">
+            <a:schemeClr val="accent1"/>
+          </a:fillRef>
+          <a:effectRef idx="2">
+            <a:schemeClr val="accent1"/>
+          </a:effectRef>
+          <a:fontRef idx="minor">
+            <a:schemeClr val="lt1"/>
+          </a:fontRef>
+        </p:style>
+        <p:txBody>
+          <a:bodyPr rtlCol="0" anchor="ctr" wrap="square" lIns="82296" rIns="82296" tIns="27432" bIns="27432"/>
+          <a:lstStyle/>
+          <a:p>
+            <a:pPr algn="l"/>
+            <a:r>
+              <a:rPr sz="1200" b="1">
                 <a:solidFill>
                   <a:srgbClr val="4FD1C5"/>
                 </a:solidFill>
                 <a:latin typeface="Helvetica Neue"/>
               </a:rPr>
-              <a:t>1</a:t>
-            </a:r>
-          </a:p>
-        </p:txBody>
-      </p:sp>
-      <p:sp>
-        <p:nvSpPr>
-          <p:cNvPr id="7" name="TextBox 6"/>
+              <a:t>TheAgentOrg</a:t>
+            </a:r>
+          </a:p>
+          <a:p>
+            <a:pPr algn="l"/>
+            <a:r>
+              <a:rPr sz="900">
+                <a:solidFill>
+                  <a:srgbClr val="8A94A6"/>
+                </a:solidFill>
+                <a:latin typeface="Helvetica Neue"/>
+              </a:rPr>
+              <a:t>the pipeline · seven jobs</a:t>
+            </a:r>
+          </a:p>
+        </p:txBody>
+      </p:sp>
+      <p:sp>
+        <p:nvSpPr>
+          <p:cNvPr id="11" name="Rounded Rectangle 10"/>
+          <p:cNvSpPr/>
+          <p:nvPr/>
+        </p:nvSpPr>
+        <p:spPr>
+          <a:xfrm>
+            <a:off x="1207008" y="3895343"/>
+            <a:ext cx="2798064" cy="420624"/>
+          </a:xfrm>
+          <a:prstGeom prst="roundRect">
+            <a:avLst>
+              <a:gd name="adj" fmla="val 8000"/>
+            </a:avLst>
+          </a:prstGeom>
+          <a:solidFill>
+            <a:srgbClr val="1C2230"/>
+          </a:solidFill>
+          <a:ln w="15875">
+            <a:solidFill>
+              <a:srgbClr val="F0A93B"/>
+            </a:solidFill>
+          </a:ln>
+          <a:effectLst/>
+        </p:spPr>
+        <p:style>
+          <a:lnRef idx="1">
+            <a:schemeClr val="accent1"/>
+          </a:lnRef>
+          <a:fillRef idx="3">
+            <a:schemeClr val="accent1"/>
+          </a:fillRef>
+          <a:effectRef idx="2">
+            <a:schemeClr val="accent1"/>
+          </a:effectRef>
+          <a:fontRef idx="minor">
+            <a:schemeClr val="lt1"/>
+          </a:fontRef>
+        </p:style>
+        <p:txBody>
+          <a:bodyPr rtlCol="0" anchor="ctr" wrap="square" lIns="82296" rIns="82296" tIns="27432" bIns="27432"/>
+          <a:lstStyle/>
+          <a:p>
+            <a:pPr algn="l"/>
+            <a:r>
+              <a:rPr sz="1100" b="1">
+                <a:solidFill>
+                  <a:srgbClr val="F0A93B"/>
+                </a:solidFill>
+                <a:latin typeface="Menlo"/>
+              </a:rPr>
+              <a:t>▲  GATE 1 · plan approved</a:t>
+            </a:r>
+          </a:p>
+        </p:txBody>
+      </p:sp>
+      <p:sp>
+        <p:nvSpPr>
+          <p:cNvPr id="12" name="Rounded Rectangle 11"/>
+          <p:cNvSpPr/>
+          <p:nvPr/>
+        </p:nvSpPr>
+        <p:spPr>
+          <a:xfrm>
+            <a:off x="1207008" y="4498847"/>
+            <a:ext cx="2798064" cy="420624"/>
+          </a:xfrm>
+          <a:prstGeom prst="roundRect">
+            <a:avLst>
+              <a:gd name="adj" fmla="val 8000"/>
+            </a:avLst>
+          </a:prstGeom>
+          <a:solidFill>
+            <a:srgbClr val="1C2230"/>
+          </a:solidFill>
+          <a:ln w="15875">
+            <a:solidFill>
+              <a:srgbClr val="F0A93B"/>
+            </a:solidFill>
+          </a:ln>
+          <a:effectLst/>
+        </p:spPr>
+        <p:style>
+          <a:lnRef idx="1">
+            <a:schemeClr val="accent1"/>
+          </a:lnRef>
+          <a:fillRef idx="3">
+            <a:schemeClr val="accent1"/>
+          </a:fillRef>
+          <a:effectRef idx="2">
+            <a:schemeClr val="accent1"/>
+          </a:effectRef>
+          <a:fontRef idx="minor">
+            <a:schemeClr val="lt1"/>
+          </a:fontRef>
+        </p:style>
+        <p:txBody>
+          <a:bodyPr rtlCol="0" anchor="ctr" wrap="square" lIns="82296" rIns="82296" tIns="27432" bIns="27432"/>
+          <a:lstStyle/>
+          <a:p>
+            <a:pPr algn="l"/>
+            <a:r>
+              <a:rPr sz="1100" b="1">
+                <a:solidFill>
+                  <a:srgbClr val="F0A93B"/>
+                </a:solidFill>
+                <a:latin typeface="Menlo"/>
+              </a:rPr>
+              <a:t>▲  GATE 2 · change approved</a:t>
+            </a:r>
+          </a:p>
+        </p:txBody>
+      </p:sp>
+      <p:sp>
+        <p:nvSpPr>
+          <p:cNvPr id="13" name="Rounded Rectangle 12"/>
+          <p:cNvSpPr/>
+          <p:nvPr/>
+        </p:nvSpPr>
+        <p:spPr>
+          <a:xfrm>
+            <a:off x="1207008" y="5102351"/>
+            <a:ext cx="2798064" cy="420624"/>
+          </a:xfrm>
+          <a:prstGeom prst="roundRect">
+            <a:avLst>
+              <a:gd name="adj" fmla="val 8000"/>
+            </a:avLst>
+          </a:prstGeom>
+          <a:solidFill>
+            <a:srgbClr val="1C2230"/>
+          </a:solidFill>
+          <a:ln w="15875">
+            <a:solidFill>
+              <a:srgbClr val="F0A93B"/>
+            </a:solidFill>
+          </a:ln>
+          <a:effectLst/>
+        </p:spPr>
+        <p:style>
+          <a:lnRef idx="1">
+            <a:schemeClr val="accent1"/>
+          </a:lnRef>
+          <a:fillRef idx="3">
+            <a:schemeClr val="accent1"/>
+          </a:fillRef>
+          <a:effectRef idx="2">
+            <a:schemeClr val="accent1"/>
+          </a:effectRef>
+          <a:fontRef idx="minor">
+            <a:schemeClr val="lt1"/>
+          </a:fontRef>
+        </p:style>
+        <p:txBody>
+          <a:bodyPr rtlCol="0" anchor="ctr" wrap="square" lIns="82296" rIns="82296" tIns="27432" bIns="27432"/>
+          <a:lstStyle/>
+          <a:p>
+            <a:pPr algn="l"/>
+            <a:r>
+              <a:rPr sz="1100" b="1">
+                <a:solidFill>
+                  <a:srgbClr val="F0A93B"/>
+                </a:solidFill>
+                <a:latin typeface="Menlo"/>
+              </a:rPr>
+              <a:t>▲  GATE 3 · release approved</a:t>
+            </a:r>
+          </a:p>
+        </p:txBody>
+      </p:sp>
+      <p:sp>
+        <p:nvSpPr>
+          <p:cNvPr id="14" name="Rounded Rectangle 13"/>
+          <p:cNvSpPr/>
+          <p:nvPr/>
+        </p:nvSpPr>
+        <p:spPr>
+          <a:xfrm>
+            <a:off x="4983479" y="2084831"/>
+            <a:ext cx="2834640" cy="2487168"/>
+          </a:xfrm>
+          <a:prstGeom prst="roundRect">
+            <a:avLst>
+              <a:gd name="adj" fmla="val 3000"/>
+            </a:avLst>
+          </a:prstGeom>
+          <a:noFill/>
+          <a:ln w="12700">
+            <a:solidFill>
+              <a:srgbClr val="2A3242"/>
+            </a:solidFill>
+            <a:prstDash val="sysDash"/>
+          </a:ln>
+          <a:effectLst/>
+        </p:spPr>
+        <p:style>
+          <a:lnRef idx="1">
+            <a:schemeClr val="accent1"/>
+          </a:lnRef>
+          <a:fillRef idx="3">
+            <a:schemeClr val="accent1"/>
+          </a:fillRef>
+          <a:effectRef idx="2">
+            <a:schemeClr val="accent1"/>
+          </a:effectRef>
+          <a:fontRef idx="minor">
+            <a:schemeClr val="lt1"/>
+          </a:fontRef>
+        </p:style>
+        <p:txBody>
+          <a:bodyPr rtlCol="0" anchor="ctr"/>
+          <a:lstStyle/>
+          <a:p>
+            <a:pPr algn="ctr"/>
+          </a:p>
+        </p:txBody>
+      </p:sp>
+      <p:sp>
+        <p:nvSpPr>
+          <p:cNvPr id="15" name="Rectangle 14"/>
+          <p:cNvSpPr/>
+          <p:nvPr/>
+        </p:nvSpPr>
+        <p:spPr>
+          <a:xfrm>
+            <a:off x="5148071" y="1984247"/>
+            <a:ext cx="420624" cy="201168"/>
+          </a:xfrm>
+          <a:prstGeom prst="rect">
+            <a:avLst/>
+          </a:prstGeom>
+          <a:solidFill>
+            <a:srgbClr val="14181F"/>
+          </a:solidFill>
+          <a:ln>
+            <a:noFill/>
+          </a:ln>
+          <a:effectLst/>
+        </p:spPr>
+        <p:style>
+          <a:lnRef idx="1">
+            <a:schemeClr val="accent1"/>
+          </a:lnRef>
+          <a:fillRef idx="3">
+            <a:schemeClr val="accent1"/>
+          </a:fillRef>
+          <a:effectRef idx="2">
+            <a:schemeClr val="accent1"/>
+          </a:effectRef>
+          <a:fontRef idx="minor">
+            <a:schemeClr val="lt1"/>
+          </a:fontRef>
+        </p:style>
+        <p:txBody>
+          <a:bodyPr rtlCol="0" anchor="ctr"/>
+          <a:lstStyle/>
+          <a:p>
+            <a:pPr algn="ctr"/>
+          </a:p>
+        </p:txBody>
+      </p:sp>
+      <p:sp>
+        <p:nvSpPr>
+          <p:cNvPr id="16" name="TextBox 15"/>
           <p:cNvSpPr txBox="1"/>
           <p:nvPr/>
         </p:nvSpPr>
         <p:spPr>
           <a:xfrm>
-            <a:off x="1600200" y="2286000"/>
-            <a:ext cx="4023360" cy="457200"/>
+            <a:off x="5184647" y="1956815"/>
+            <a:ext cx="2926080" cy="237744"/>
           </a:xfrm>
           <a:prstGeom prst="rect">
             <a:avLst/>
@@ -12842,27 +13942,325 @@
               </a:lnSpc>
             </a:pPr>
             <a:r>
-              <a:rPr sz="1900" b="1">
+              <a:rPr sz="900" b="1">
+                <a:solidFill>
+                  <a:srgbClr val="8A94A6"/>
+                </a:solidFill>
+                <a:latin typeface="Helvetica Neue"/>
+              </a:rPr>
+              <a:t>AWS</a:t>
+            </a:r>
+          </a:p>
+        </p:txBody>
+      </p:sp>
+      <p:sp>
+        <p:nvSpPr>
+          <p:cNvPr id="17" name="Rounded Rectangle 16"/>
+          <p:cNvSpPr/>
+          <p:nvPr/>
+        </p:nvSpPr>
+        <p:spPr>
+          <a:xfrm>
+            <a:off x="5184647" y="2395727"/>
+            <a:ext cx="2432304" cy="566928"/>
+          </a:xfrm>
+          <a:prstGeom prst="roundRect">
+            <a:avLst>
+              <a:gd name="adj" fmla="val 8000"/>
+            </a:avLst>
+          </a:prstGeom>
+          <a:solidFill>
+            <a:srgbClr val="1C2230"/>
+          </a:solidFill>
+          <a:ln w="15875">
+            <a:solidFill>
+              <a:srgbClr val="2A3242"/>
+            </a:solidFill>
+          </a:ln>
+          <a:effectLst/>
+        </p:spPr>
+        <p:style>
+          <a:lnRef idx="1">
+            <a:schemeClr val="accent1"/>
+          </a:lnRef>
+          <a:fillRef idx="3">
+            <a:schemeClr val="accent1"/>
+          </a:fillRef>
+          <a:effectRef idx="2">
+            <a:schemeClr val="accent1"/>
+          </a:effectRef>
+          <a:fontRef idx="minor">
+            <a:schemeClr val="lt1"/>
+          </a:fontRef>
+        </p:style>
+        <p:txBody>
+          <a:bodyPr rtlCol="0" anchor="ctr" wrap="square" lIns="82296" rIns="82296" tIns="27432" bIns="27432"/>
+          <a:lstStyle/>
+          <a:p>
+            <a:pPr algn="l"/>
+            <a:r>
+              <a:rPr sz="1200" b="1">
                 <a:solidFill>
                   <a:srgbClr val="E8EDF4"/>
                 </a:solidFill>
                 <a:latin typeface="Helvetica Neue"/>
               </a:rPr>
-              <a:t>A ticket is opened</a:t>
-            </a:r>
-          </a:p>
-        </p:txBody>
-      </p:sp>
-      <p:sp>
-        <p:nvSpPr>
-          <p:cNvPr id="8" name="TextBox 7"/>
+              <a:t>Lambda</a:t>
+            </a:r>
+          </a:p>
+          <a:p>
+            <a:pPr algn="l"/>
+            <a:r>
+              <a:rPr sz="900">
+                <a:solidFill>
+                  <a:srgbClr val="8A94A6"/>
+                </a:solidFill>
+                <a:latin typeface="Helvetica Neue"/>
+              </a:rPr>
+              <a:t>verifies the signature first</a:t>
+            </a:r>
+          </a:p>
+        </p:txBody>
+      </p:sp>
+      <p:sp>
+        <p:nvSpPr>
+          <p:cNvPr id="18" name="Rounded Rectangle 17"/>
+          <p:cNvSpPr/>
+          <p:nvPr/>
+        </p:nvSpPr>
+        <p:spPr>
+          <a:xfrm>
+            <a:off x="5184647" y="3090671"/>
+            <a:ext cx="2432304" cy="566928"/>
+          </a:xfrm>
+          <a:prstGeom prst="roundRect">
+            <a:avLst>
+              <a:gd name="adj" fmla="val 8000"/>
+            </a:avLst>
+          </a:prstGeom>
+          <a:solidFill>
+            <a:srgbClr val="1C2230"/>
+          </a:solidFill>
+          <a:ln w="15875">
+            <a:solidFill>
+              <a:srgbClr val="2A3242"/>
+            </a:solidFill>
+          </a:ln>
+          <a:effectLst/>
+        </p:spPr>
+        <p:style>
+          <a:lnRef idx="1">
+            <a:schemeClr val="accent1"/>
+          </a:lnRef>
+          <a:fillRef idx="3">
+            <a:schemeClr val="accent1"/>
+          </a:fillRef>
+          <a:effectRef idx="2">
+            <a:schemeClr val="accent1"/>
+          </a:effectRef>
+          <a:fontRef idx="minor">
+            <a:schemeClr val="lt1"/>
+          </a:fontRef>
+        </p:style>
+        <p:txBody>
+          <a:bodyPr rtlCol="0" anchor="ctr" wrap="square" lIns="82296" rIns="82296" tIns="27432" bIns="27432"/>
+          <a:lstStyle/>
+          <a:p>
+            <a:pPr algn="l"/>
+            <a:r>
+              <a:rPr sz="1200" b="1">
+                <a:solidFill>
+                  <a:srgbClr val="E8EDF4"/>
+                </a:solidFill>
+                <a:latin typeface="Helvetica Neue"/>
+              </a:rPr>
+              <a:t>EventBridge</a:t>
+            </a:r>
+          </a:p>
+          <a:p>
+            <a:pPr algn="l"/>
+            <a:r>
+              <a:rPr sz="900">
+                <a:solidFill>
+                  <a:srgbClr val="8A94A6"/>
+                </a:solidFill>
+                <a:latin typeface="Helvetica Neue"/>
+              </a:rPr>
+              <a:t>routes it · dead-letter queue</a:t>
+            </a:r>
+          </a:p>
+        </p:txBody>
+      </p:sp>
+      <p:sp>
+        <p:nvSpPr>
+          <p:cNvPr id="19" name="Rounded Rectangle 18"/>
+          <p:cNvSpPr/>
+          <p:nvPr/>
+        </p:nvSpPr>
+        <p:spPr>
+          <a:xfrm>
+            <a:off x="5184647" y="3785615"/>
+            <a:ext cx="2432304" cy="566928"/>
+          </a:xfrm>
+          <a:prstGeom prst="roundRect">
+            <a:avLst>
+              <a:gd name="adj" fmla="val 8000"/>
+            </a:avLst>
+          </a:prstGeom>
+          <a:solidFill>
+            <a:srgbClr val="1C2230"/>
+          </a:solidFill>
+          <a:ln w="15875">
+            <a:solidFill>
+              <a:srgbClr val="2A3242"/>
+            </a:solidFill>
+          </a:ln>
+          <a:effectLst/>
+        </p:spPr>
+        <p:style>
+          <a:lnRef idx="1">
+            <a:schemeClr val="accent1"/>
+          </a:lnRef>
+          <a:fillRef idx="3">
+            <a:schemeClr val="accent1"/>
+          </a:fillRef>
+          <a:effectRef idx="2">
+            <a:schemeClr val="accent1"/>
+          </a:effectRef>
+          <a:fontRef idx="minor">
+            <a:schemeClr val="lt1"/>
+          </a:fontRef>
+        </p:style>
+        <p:txBody>
+          <a:bodyPr rtlCol="0" anchor="ctr" wrap="square" lIns="82296" rIns="82296" tIns="27432" bIns="27432"/>
+          <a:lstStyle/>
+          <a:p>
+            <a:pPr algn="l"/>
+            <a:r>
+              <a:rPr sz="1200" b="1">
+                <a:solidFill>
+                  <a:srgbClr val="E8EDF4"/>
+                </a:solidFill>
+                <a:latin typeface="Helvetica Neue"/>
+              </a:rPr>
+              <a:t>Bedrock</a:t>
+            </a:r>
+          </a:p>
+          <a:p>
+            <a:pPr algn="l"/>
+            <a:r>
+              <a:rPr sz="900">
+                <a:solidFill>
+                  <a:srgbClr val="8A94A6"/>
+                </a:solidFill>
+                <a:latin typeface="Helvetica Neue"/>
+              </a:rPr>
+              <a:t>the model the agents call</a:t>
+            </a:r>
+          </a:p>
+        </p:txBody>
+      </p:sp>
+      <p:sp>
+        <p:nvSpPr>
+          <p:cNvPr id="20" name="Rounded Rectangle 19"/>
+          <p:cNvSpPr/>
+          <p:nvPr/>
+        </p:nvSpPr>
+        <p:spPr>
+          <a:xfrm>
+            <a:off x="8321040" y="2084831"/>
+            <a:ext cx="2697480" cy="3877056"/>
+          </a:xfrm>
+          <a:prstGeom prst="roundRect">
+            <a:avLst>
+              <a:gd name="adj" fmla="val 3000"/>
+            </a:avLst>
+          </a:prstGeom>
+          <a:noFill/>
+          <a:ln w="12700">
+            <a:solidFill>
+              <a:srgbClr val="2A3242"/>
+            </a:solidFill>
+            <a:prstDash val="sysDash"/>
+          </a:ln>
+          <a:effectLst/>
+        </p:spPr>
+        <p:style>
+          <a:lnRef idx="1">
+            <a:schemeClr val="accent1"/>
+          </a:lnRef>
+          <a:fillRef idx="3">
+            <a:schemeClr val="accent1"/>
+          </a:fillRef>
+          <a:effectRef idx="2">
+            <a:schemeClr val="accent1"/>
+          </a:effectRef>
+          <a:fontRef idx="minor">
+            <a:schemeClr val="lt1"/>
+          </a:fontRef>
+        </p:style>
+        <p:txBody>
+          <a:bodyPr rtlCol="0" anchor="ctr"/>
+          <a:lstStyle/>
+          <a:p>
+            <a:pPr algn="ctr"/>
+          </a:p>
+        </p:txBody>
+      </p:sp>
+      <p:sp>
+        <p:nvSpPr>
+          <p:cNvPr id="21" name="Rectangle 20"/>
+          <p:cNvSpPr/>
+          <p:nvPr/>
+        </p:nvSpPr>
+        <p:spPr>
+          <a:xfrm>
+            <a:off x="8485632" y="1984247"/>
+            <a:ext cx="1463040" cy="201168"/>
+          </a:xfrm>
+          <a:prstGeom prst="rect">
+            <a:avLst/>
+          </a:prstGeom>
+          <a:solidFill>
+            <a:srgbClr val="14181F"/>
+          </a:solidFill>
+          <a:ln>
+            <a:noFill/>
+          </a:ln>
+          <a:effectLst/>
+        </p:spPr>
+        <p:style>
+          <a:lnRef idx="1">
+            <a:schemeClr val="accent1"/>
+          </a:lnRef>
+          <a:fillRef idx="3">
+            <a:schemeClr val="accent1"/>
+          </a:fillRef>
+          <a:effectRef idx="2">
+            <a:schemeClr val="accent1"/>
+          </a:effectRef>
+          <a:fontRef idx="minor">
+            <a:schemeClr val="lt1"/>
+          </a:fontRef>
+        </p:style>
+        <p:txBody>
+          <a:bodyPr rtlCol="0" anchor="ctr"/>
+          <a:lstStyle/>
+          <a:p>
+            <a:pPr algn="ctr"/>
+          </a:p>
+        </p:txBody>
+      </p:sp>
+      <p:sp>
+        <p:nvSpPr>
+          <p:cNvPr id="22" name="TextBox 21"/>
           <p:cNvSpPr txBox="1"/>
           <p:nvPr/>
         </p:nvSpPr>
         <p:spPr>
           <a:xfrm>
-            <a:off x="5760720" y="2286000"/>
-            <a:ext cx="5394960" cy="457200"/>
+            <a:off x="8522208" y="1956815"/>
+            <a:ext cx="2926080" cy="237744"/>
           </a:xfrm>
           <a:prstGeom prst="rect">
             <a:avLst/>
@@ -12881,27 +14279,372 @@
               </a:lnSpc>
             </a:pPr>
             <a:r>
-              <a:rPr sz="1700" b="0">
+              <a:rPr sz="900" b="1">
                 <a:solidFill>
                   <a:srgbClr val="8A94A6"/>
                 </a:solidFill>
                 <a:latin typeface="Helvetica Neue"/>
               </a:rPr>
-              <a:t>a GitHub issue — the only trigger</a:t>
-            </a:r>
-          </a:p>
-        </p:txBody>
-      </p:sp>
-      <p:sp>
-        <p:nvSpPr>
-          <p:cNvPr id="9" name="TextBox 8"/>
+              <a:t>AGENTCORE · 5 RUNTIMES</a:t>
+            </a:r>
+          </a:p>
+        </p:txBody>
+      </p:sp>
+      <p:sp>
+        <p:nvSpPr>
+          <p:cNvPr id="23" name="Rounded Rectangle 22"/>
+          <p:cNvSpPr/>
+          <p:nvPr/>
+        </p:nvSpPr>
+        <p:spPr>
+          <a:xfrm>
+            <a:off x="8503920" y="2395727"/>
+            <a:ext cx="2331720" cy="420624"/>
+          </a:xfrm>
+          <a:prstGeom prst="roundRect">
+            <a:avLst>
+              <a:gd name="adj" fmla="val 8000"/>
+            </a:avLst>
+          </a:prstGeom>
+          <a:solidFill>
+            <a:srgbClr val="1C2230"/>
+          </a:solidFill>
+          <a:ln w="15875">
+            <a:solidFill>
+              <a:srgbClr val="2A3242"/>
+            </a:solidFill>
+          </a:ln>
+          <a:effectLst/>
+        </p:spPr>
+        <p:style>
+          <a:lnRef idx="1">
+            <a:schemeClr val="accent1"/>
+          </a:lnRef>
+          <a:fillRef idx="3">
+            <a:schemeClr val="accent1"/>
+          </a:fillRef>
+          <a:effectRef idx="2">
+            <a:schemeClr val="accent1"/>
+          </a:effectRef>
+          <a:fontRef idx="minor">
+            <a:schemeClr val="lt1"/>
+          </a:fontRef>
+        </p:style>
+        <p:txBody>
+          <a:bodyPr rtlCol="0" anchor="ctr" wrap="square" lIns="82296" rIns="82296" tIns="27432" bIns="27432"/>
+          <a:lstStyle/>
+          <a:p>
+            <a:pPr algn="l"/>
+            <a:r>
+              <a:rPr sz="1100" b="1">
+                <a:solidFill>
+                  <a:srgbClr val="E8EDF4"/>
+                </a:solidFill>
+                <a:latin typeface="Menlo"/>
+              </a:rPr>
+              <a:t>planner</a:t>
+            </a:r>
+          </a:p>
+          <a:p>
+            <a:pPr algn="l"/>
+            <a:r>
+              <a:rPr sz="900">
+                <a:solidFill>
+                  <a:srgbClr val="8A94A6"/>
+                </a:solidFill>
+                <a:latin typeface="Helvetica Neue"/>
+              </a:rPr>
+              <a:t>breaks the ticket down</a:t>
+            </a:r>
+          </a:p>
+        </p:txBody>
+      </p:sp>
+      <p:sp>
+        <p:nvSpPr>
+          <p:cNvPr id="24" name="Rounded Rectangle 23"/>
+          <p:cNvSpPr/>
+          <p:nvPr/>
+        </p:nvSpPr>
+        <p:spPr>
+          <a:xfrm>
+            <a:off x="8503920" y="3035807"/>
+            <a:ext cx="2331720" cy="420624"/>
+          </a:xfrm>
+          <a:prstGeom prst="roundRect">
+            <a:avLst>
+              <a:gd name="adj" fmla="val 8000"/>
+            </a:avLst>
+          </a:prstGeom>
+          <a:solidFill>
+            <a:srgbClr val="1C2230"/>
+          </a:solidFill>
+          <a:ln w="15875">
+            <a:solidFill>
+              <a:srgbClr val="2A3242"/>
+            </a:solidFill>
+          </a:ln>
+          <a:effectLst/>
+        </p:spPr>
+        <p:style>
+          <a:lnRef idx="1">
+            <a:schemeClr val="accent1"/>
+          </a:lnRef>
+          <a:fillRef idx="3">
+            <a:schemeClr val="accent1"/>
+          </a:fillRef>
+          <a:effectRef idx="2">
+            <a:schemeClr val="accent1"/>
+          </a:effectRef>
+          <a:fontRef idx="minor">
+            <a:schemeClr val="lt1"/>
+          </a:fontRef>
+        </p:style>
+        <p:txBody>
+          <a:bodyPr rtlCol="0" anchor="ctr" wrap="square" lIns="82296" rIns="82296" tIns="27432" bIns="27432"/>
+          <a:lstStyle/>
+          <a:p>
+            <a:pPr algn="l"/>
+            <a:r>
+              <a:rPr sz="1100" b="1">
+                <a:solidFill>
+                  <a:srgbClr val="E8EDF4"/>
+                </a:solidFill>
+                <a:latin typeface="Menlo"/>
+              </a:rPr>
+              <a:t>developer</a:t>
+            </a:r>
+          </a:p>
+          <a:p>
+            <a:pPr algn="l"/>
+            <a:r>
+              <a:rPr sz="900">
+                <a:solidFill>
+                  <a:srgbClr val="8A94A6"/>
+                </a:solidFill>
+                <a:latin typeface="Helvetica Neue"/>
+              </a:rPr>
+              <a:t>writes the change</a:t>
+            </a:r>
+          </a:p>
+        </p:txBody>
+      </p:sp>
+      <p:sp>
+        <p:nvSpPr>
+          <p:cNvPr id="25" name="Rounded Rectangle 24"/>
+          <p:cNvSpPr/>
+          <p:nvPr/>
+        </p:nvSpPr>
+        <p:spPr>
+          <a:xfrm>
+            <a:off x="8503920" y="3675887"/>
+            <a:ext cx="2331720" cy="420624"/>
+          </a:xfrm>
+          <a:prstGeom prst="roundRect">
+            <a:avLst>
+              <a:gd name="adj" fmla="val 8000"/>
+            </a:avLst>
+          </a:prstGeom>
+          <a:solidFill>
+            <a:srgbClr val="1C2230"/>
+          </a:solidFill>
+          <a:ln w="15875">
+            <a:solidFill>
+              <a:srgbClr val="2A3242"/>
+            </a:solidFill>
+          </a:ln>
+          <a:effectLst/>
+        </p:spPr>
+        <p:style>
+          <a:lnRef idx="1">
+            <a:schemeClr val="accent1"/>
+          </a:lnRef>
+          <a:fillRef idx="3">
+            <a:schemeClr val="accent1"/>
+          </a:fillRef>
+          <a:effectRef idx="2">
+            <a:schemeClr val="accent1"/>
+          </a:effectRef>
+          <a:fontRef idx="minor">
+            <a:schemeClr val="lt1"/>
+          </a:fontRef>
+        </p:style>
+        <p:txBody>
+          <a:bodyPr rtlCol="0" anchor="ctr" wrap="square" lIns="82296" rIns="82296" tIns="27432" bIns="27432"/>
+          <a:lstStyle/>
+          <a:p>
+            <a:pPr algn="l"/>
+            <a:r>
+              <a:rPr sz="1100" b="1">
+                <a:solidFill>
+                  <a:srgbClr val="E8EDF4"/>
+                </a:solidFill>
+                <a:latin typeface="Menlo"/>
+              </a:rPr>
+              <a:t>reviewer</a:t>
+            </a:r>
+          </a:p>
+          <a:p>
+            <a:pPr algn="l"/>
+            <a:r>
+              <a:rPr sz="900">
+                <a:solidFill>
+                  <a:srgbClr val="8A94A6"/>
+                </a:solidFill>
+                <a:latin typeface="Helvetica Neue"/>
+              </a:rPr>
+              <a:t>critiques it</a:t>
+            </a:r>
+          </a:p>
+        </p:txBody>
+      </p:sp>
+      <p:sp>
+        <p:nvSpPr>
+          <p:cNvPr id="26" name="Rounded Rectangle 25"/>
+          <p:cNvSpPr/>
+          <p:nvPr/>
+        </p:nvSpPr>
+        <p:spPr>
+          <a:xfrm>
+            <a:off x="8503920" y="4315966"/>
+            <a:ext cx="2331720" cy="420624"/>
+          </a:xfrm>
+          <a:prstGeom prst="roundRect">
+            <a:avLst>
+              <a:gd name="adj" fmla="val 8000"/>
+            </a:avLst>
+          </a:prstGeom>
+          <a:solidFill>
+            <a:srgbClr val="1C2230"/>
+          </a:solidFill>
+          <a:ln w="15875">
+            <a:solidFill>
+              <a:srgbClr val="4FD1C5"/>
+            </a:solidFill>
+          </a:ln>
+          <a:effectLst/>
+        </p:spPr>
+        <p:style>
+          <a:lnRef idx="1">
+            <a:schemeClr val="accent1"/>
+          </a:lnRef>
+          <a:fillRef idx="3">
+            <a:schemeClr val="accent1"/>
+          </a:fillRef>
+          <a:effectRef idx="2">
+            <a:schemeClr val="accent1"/>
+          </a:effectRef>
+          <a:fontRef idx="minor">
+            <a:schemeClr val="lt1"/>
+          </a:fontRef>
+        </p:style>
+        <p:txBody>
+          <a:bodyPr rtlCol="0" anchor="ctr" wrap="square" lIns="82296" rIns="82296" tIns="27432" bIns="27432"/>
+          <a:lstStyle/>
+          <a:p>
+            <a:pPr algn="l"/>
+            <a:r>
+              <a:rPr sz="1100" b="1">
+                <a:solidFill>
+                  <a:srgbClr val="4FD1C5"/>
+                </a:solidFill>
+                <a:latin typeface="Menlo"/>
+              </a:rPr>
+              <a:t>security</a:t>
+            </a:r>
+          </a:p>
+          <a:p>
+            <a:pPr algn="l"/>
+            <a:r>
+              <a:rPr sz="900">
+                <a:solidFill>
+                  <a:srgbClr val="8A94A6"/>
+                </a:solidFill>
+                <a:latin typeface="Helvetica Neue"/>
+              </a:rPr>
+              <a:t>three real scanners</a:t>
+            </a:r>
+          </a:p>
+        </p:txBody>
+      </p:sp>
+      <p:sp>
+        <p:nvSpPr>
+          <p:cNvPr id="27" name="Rounded Rectangle 26"/>
+          <p:cNvSpPr/>
+          <p:nvPr/>
+        </p:nvSpPr>
+        <p:spPr>
+          <a:xfrm>
+            <a:off x="8503920" y="4956046"/>
+            <a:ext cx="2331720" cy="420624"/>
+          </a:xfrm>
+          <a:prstGeom prst="roundRect">
+            <a:avLst>
+              <a:gd name="adj" fmla="val 8000"/>
+            </a:avLst>
+          </a:prstGeom>
+          <a:solidFill>
+            <a:srgbClr val="1C2230"/>
+          </a:solidFill>
+          <a:ln w="15875">
+            <a:solidFill>
+              <a:srgbClr val="2A3242"/>
+            </a:solidFill>
+          </a:ln>
+          <a:effectLst/>
+        </p:spPr>
+        <p:style>
+          <a:lnRef idx="1">
+            <a:schemeClr val="accent1"/>
+          </a:lnRef>
+          <a:fillRef idx="3">
+            <a:schemeClr val="accent1"/>
+          </a:fillRef>
+          <a:effectRef idx="2">
+            <a:schemeClr val="accent1"/>
+          </a:effectRef>
+          <a:fontRef idx="minor">
+            <a:schemeClr val="lt1"/>
+          </a:fontRef>
+        </p:style>
+        <p:txBody>
+          <a:bodyPr rtlCol="0" anchor="ctr" wrap="square" lIns="82296" rIns="82296" tIns="27432" bIns="27432"/>
+          <a:lstStyle/>
+          <a:p>
+            <a:pPr algn="l"/>
+            <a:r>
+              <a:rPr sz="1100" b="1">
+                <a:solidFill>
+                  <a:srgbClr val="E8EDF4"/>
+                </a:solidFill>
+                <a:latin typeface="Menlo"/>
+              </a:rPr>
+              <a:t>sre</a:t>
+            </a:r>
+          </a:p>
+          <a:p>
+            <a:pPr algn="l"/>
+            <a:r>
+              <a:rPr sz="900">
+                <a:solidFill>
+                  <a:srgbClr val="8A94A6"/>
+                </a:solidFill>
+                <a:latin typeface="Helvetica Neue"/>
+              </a:rPr>
+              <a:t>release readiness</a:t>
+            </a:r>
+          </a:p>
+        </p:txBody>
+      </p:sp>
+      <p:sp>
+        <p:nvSpPr>
+          <p:cNvPr id="28" name="TextBox 27"/>
           <p:cNvSpPr txBox="1"/>
           <p:nvPr/>
         </p:nvSpPr>
         <p:spPr>
           <a:xfrm>
-            <a:off x="1005840" y="2999232"/>
-            <a:ext cx="457200" cy="457200"/>
+            <a:off x="8503920" y="5614415"/>
+            <a:ext cx="2331720" cy="457200"/>
           </a:xfrm>
           <a:prstGeom prst="rect">
             <a:avLst/>
@@ -12920,38 +14663,15 @@
               </a:lnSpc>
             </a:pPr>
             <a:r>
-              <a:rPr sz="1900" b="1">
-                <a:solidFill>
-                  <a:srgbClr val="4FD1C5"/>
-                </a:solidFill>
-                <a:latin typeface="Helvetica Neue"/>
-              </a:rPr>
-              <a:t>2</a:t>
-            </a:r>
-          </a:p>
-        </p:txBody>
-      </p:sp>
-      <p:sp>
-        <p:nvSpPr>
-          <p:cNvPr id="10" name="TextBox 9"/>
-          <p:cNvSpPr txBox="1"/>
-          <p:nvPr/>
-        </p:nvSpPr>
-        <p:spPr>
-          <a:xfrm>
-            <a:off x="1600200" y="2999232"/>
-            <a:ext cx="4023360" cy="457200"/>
-          </a:xfrm>
-          <a:prstGeom prst="rect">
-            <a:avLst/>
-          </a:prstGeom>
-          <a:noFill/>
-        </p:spPr>
-        <p:txBody>
-          <a:bodyPr wrap="square">
-            <a:spAutoFit/>
-          </a:bodyPr>
-          <a:lstStyle/>
+              <a:rPr sz="1000" b="0">
+                <a:solidFill>
+                  <a:srgbClr val="8A94A6"/>
+                </a:solidFill>
+                <a:latin typeface="Helvetica Neue"/>
+              </a:rPr>
+              <a:t>one image · five tags</a:t>
+            </a:r>
+          </a:p>
           <a:p>
             <a:pPr algn="l">
               <a:lnSpc>
@@ -12959,27 +14679,261 @@
               </a:lnSpc>
             </a:pPr>
             <a:r>
-              <a:rPr sz="1900" b="1">
-                <a:solidFill>
-                  <a:srgbClr val="E8EDF4"/>
-                </a:solidFill>
-                <a:latin typeface="Helvetica Neue"/>
-              </a:rPr>
-              <a:t>Signed and verified</a:t>
-            </a:r>
-          </a:p>
-        </p:txBody>
-      </p:sp>
-      <p:sp>
-        <p:nvSpPr>
-          <p:cNvPr id="11" name="TextBox 10"/>
+              <a:rPr sz="1000" b="0">
+                <a:solidFill>
+                  <a:srgbClr val="8A94A6"/>
+                </a:solidFill>
+                <a:latin typeface="Helvetica Neue"/>
+              </a:rPr>
+              <a:t>differing only by role</a:t>
+            </a:r>
+          </a:p>
+        </p:txBody>
+      </p:sp>
+      <p:sp>
+        <p:nvSpPr>
+          <p:cNvPr id="29" name="TextBox 28"/>
           <p:cNvSpPr txBox="1"/>
           <p:nvPr/>
         </p:nvSpPr>
         <p:spPr>
           <a:xfrm>
-            <a:off x="5760720" y="2999232"/>
-            <a:ext cx="5394960" cy="457200"/>
+            <a:off x="4279392" y="2487167"/>
+            <a:ext cx="822960" cy="274320"/>
+          </a:xfrm>
+          <a:prstGeom prst="rect">
+            <a:avLst/>
+          </a:prstGeom>
+          <a:noFill/>
+        </p:spPr>
+        <p:txBody>
+          <a:bodyPr wrap="square">
+            <a:spAutoFit/>
+          </a:bodyPr>
+          <a:lstStyle/>
+          <a:p>
+            <a:pPr algn="ctr">
+              <a:lnSpc>
+                <a:spcPct val="120000"/>
+              </a:lnSpc>
+            </a:pPr>
+            <a:r>
+              <a:rPr sz="1700" b="0">
+                <a:solidFill>
+                  <a:srgbClr val="4FD1C5"/>
+                </a:solidFill>
+                <a:latin typeface="Helvetica Neue"/>
+              </a:rPr>
+              <a:t>→</a:t>
+            </a:r>
+          </a:p>
+        </p:txBody>
+      </p:sp>
+      <p:sp>
+        <p:nvSpPr>
+          <p:cNvPr id="30" name="TextBox 29"/>
+          <p:cNvSpPr txBox="1"/>
+          <p:nvPr/>
+        </p:nvSpPr>
+        <p:spPr>
+          <a:xfrm>
+            <a:off x="4050792" y="2871215"/>
+            <a:ext cx="1280160" cy="201168"/>
+          </a:xfrm>
+          <a:prstGeom prst="rect">
+            <a:avLst/>
+          </a:prstGeom>
+          <a:noFill/>
+        </p:spPr>
+        <p:txBody>
+          <a:bodyPr wrap="square">
+            <a:spAutoFit/>
+          </a:bodyPr>
+          <a:lstStyle/>
+          <a:p>
+            <a:pPr algn="ctr">
+              <a:lnSpc>
+                <a:spcPct val="120000"/>
+              </a:lnSpc>
+            </a:pPr>
+            <a:r>
+              <a:rPr sz="900" b="0">
+                <a:solidFill>
+                  <a:srgbClr val="8A94A6"/>
+                </a:solidFill>
+                <a:latin typeface="Menlo"/>
+              </a:rPr>
+              <a:t>webhook</a:t>
+            </a:r>
+          </a:p>
+        </p:txBody>
+      </p:sp>
+      <p:sp>
+        <p:nvSpPr>
+          <p:cNvPr id="31" name="TextBox 30"/>
+          <p:cNvSpPr txBox="1"/>
+          <p:nvPr/>
+        </p:nvSpPr>
+        <p:spPr>
+          <a:xfrm>
+            <a:off x="4279392" y="3163823"/>
+            <a:ext cx="822960" cy="274320"/>
+          </a:xfrm>
+          <a:prstGeom prst="rect">
+            <a:avLst/>
+          </a:prstGeom>
+          <a:noFill/>
+        </p:spPr>
+        <p:txBody>
+          <a:bodyPr wrap="square">
+            <a:spAutoFit/>
+          </a:bodyPr>
+          <a:lstStyle/>
+          <a:p>
+            <a:pPr algn="ctr">
+              <a:lnSpc>
+                <a:spcPct val="120000"/>
+              </a:lnSpc>
+            </a:pPr>
+            <a:r>
+              <a:rPr sz="1700" b="0">
+                <a:solidFill>
+                  <a:srgbClr val="4FD1C5"/>
+                </a:solidFill>
+                <a:latin typeface="Helvetica Neue"/>
+              </a:rPr>
+              <a:t>←</a:t>
+            </a:r>
+          </a:p>
+        </p:txBody>
+      </p:sp>
+      <p:sp>
+        <p:nvSpPr>
+          <p:cNvPr id="32" name="TextBox 31"/>
+          <p:cNvSpPr txBox="1"/>
+          <p:nvPr/>
+        </p:nvSpPr>
+        <p:spPr>
+          <a:xfrm>
+            <a:off x="4050792" y="3547871"/>
+            <a:ext cx="1280160" cy="201168"/>
+          </a:xfrm>
+          <a:prstGeom prst="rect">
+            <a:avLst/>
+          </a:prstGeom>
+          <a:noFill/>
+        </p:spPr>
+        <p:txBody>
+          <a:bodyPr wrap="square">
+            <a:spAutoFit/>
+          </a:bodyPr>
+          <a:lstStyle/>
+          <a:p>
+            <a:pPr algn="ctr">
+              <a:lnSpc>
+                <a:spcPct val="120000"/>
+              </a:lnSpc>
+            </a:pPr>
+            <a:r>
+              <a:rPr sz="900" b="0">
+                <a:solidFill>
+                  <a:srgbClr val="8A94A6"/>
+                </a:solidFill>
+                <a:latin typeface="Menlo"/>
+              </a:rPr>
+              <a:t>dispatch</a:t>
+            </a:r>
+          </a:p>
+        </p:txBody>
+      </p:sp>
+      <p:sp>
+        <p:nvSpPr>
+          <p:cNvPr id="33" name="TextBox 32"/>
+          <p:cNvSpPr txBox="1"/>
+          <p:nvPr/>
+        </p:nvSpPr>
+        <p:spPr>
+          <a:xfrm>
+            <a:off x="7790688" y="3163823"/>
+            <a:ext cx="603504" cy="274320"/>
+          </a:xfrm>
+          <a:prstGeom prst="rect">
+            <a:avLst/>
+          </a:prstGeom>
+          <a:noFill/>
+        </p:spPr>
+        <p:txBody>
+          <a:bodyPr wrap="square">
+            <a:spAutoFit/>
+          </a:bodyPr>
+          <a:lstStyle/>
+          <a:p>
+            <a:pPr algn="ctr">
+              <a:lnSpc>
+                <a:spcPct val="120000"/>
+              </a:lnSpc>
+            </a:pPr>
+            <a:r>
+              <a:rPr sz="1700" b="0">
+                <a:solidFill>
+                  <a:srgbClr val="4FD1C5"/>
+                </a:solidFill>
+                <a:latin typeface="Helvetica Neue"/>
+              </a:rPr>
+              <a:t>→</a:t>
+            </a:r>
+          </a:p>
+        </p:txBody>
+      </p:sp>
+      <p:sp>
+        <p:nvSpPr>
+          <p:cNvPr id="34" name="TextBox 33"/>
+          <p:cNvSpPr txBox="1"/>
+          <p:nvPr/>
+        </p:nvSpPr>
+        <p:spPr>
+          <a:xfrm>
+            <a:off x="7790688" y="3547871"/>
+            <a:ext cx="603504" cy="201168"/>
+          </a:xfrm>
+          <a:prstGeom prst="rect">
+            <a:avLst/>
+          </a:prstGeom>
+          <a:noFill/>
+        </p:spPr>
+        <p:txBody>
+          <a:bodyPr wrap="square">
+            <a:spAutoFit/>
+          </a:bodyPr>
+          <a:lstStyle/>
+          <a:p>
+            <a:pPr algn="ctr">
+              <a:lnSpc>
+                <a:spcPct val="120000"/>
+              </a:lnSpc>
+            </a:pPr>
+            <a:r>
+              <a:rPr sz="900" b="0">
+                <a:solidFill>
+                  <a:srgbClr val="8A94A6"/>
+                </a:solidFill>
+                <a:latin typeface="Menlo"/>
+              </a:rPr>
+              <a:t>invoke</a:t>
+            </a:r>
+          </a:p>
+        </p:txBody>
+      </p:sp>
+      <p:sp>
+        <p:nvSpPr>
+          <p:cNvPr id="35" name="TextBox 34"/>
+          <p:cNvSpPr txBox="1"/>
+          <p:nvPr/>
+        </p:nvSpPr>
+        <p:spPr>
+          <a:xfrm>
+            <a:off x="1005840" y="6199632"/>
+            <a:ext cx="10241280" cy="365760"/>
           </a:xfrm>
           <a:prstGeom prst="rect">
             <a:avLst/>
@@ -12998,26 +14952,429 @@
               </a:lnSpc>
             </a:pPr>
             <a:r>
-              <a:rPr sz="1700" b="0">
+              <a:rPr sz="1400" b="0">
+                <a:solidFill>
+                  <a:srgbClr val="4FD1C5"/>
+                </a:solidFill>
+                <a:latin typeface="Helvetica Neue"/>
+              </a:rPr>
+              <a:t>No laptop anywhere in that path   ·   no long-lived cloud credentials   ·   the three gates are GitHub's, not ours to bypass</a:t>
+            </a:r>
+          </a:p>
+        </p:txBody>
+      </p:sp>
+      <p:sp>
+        <p:nvSpPr>
+          <p:cNvPr id="36" name="TextBox 35"/>
+          <p:cNvSpPr txBox="1"/>
+          <p:nvPr/>
+        </p:nvSpPr>
+        <p:spPr>
+          <a:xfrm>
+            <a:off x="11247120" y="6272784"/>
+            <a:ext cx="548640" cy="292608"/>
+          </a:xfrm>
+          <a:prstGeom prst="rect">
+            <a:avLst/>
+          </a:prstGeom>
+          <a:noFill/>
+        </p:spPr>
+        <p:txBody>
+          <a:bodyPr wrap="square">
+            <a:spAutoFit/>
+          </a:bodyPr>
+          <a:lstStyle/>
+          <a:p>
+            <a:pPr algn="r">
+              <a:lnSpc>
+                <a:spcPct val="120000"/>
+              </a:lnSpc>
+            </a:pPr>
+            <a:r>
+              <a:rPr sz="1100" b="0">
                 <a:solidFill>
                   <a:srgbClr val="8A94A6"/>
                 </a:solidFill>
                 <a:latin typeface="Helvetica Neue"/>
               </a:rPr>
-              <a:t>authenticated before anything runs</a:t>
-            </a:r>
-          </a:p>
-        </p:txBody>
-      </p:sp>
-      <p:sp>
-        <p:nvSpPr>
-          <p:cNvPr id="12" name="TextBox 11"/>
+              <a:t>8</a:t>
+            </a:r>
+          </a:p>
+        </p:txBody>
+      </p:sp>
+    </p:spTree>
+  </p:cSld>
+  <p:clrMapOvr>
+    <a:masterClrMapping/>
+  </p:clrMapOvr>
+  <p:transition spd="med">
+    <p:wipe dir="l"/>
+  </p:transition>
+  <p:timing>
+    <p:tnLst>
+      <p:par>
+        <p:cTn id="1" dur="indefinite" restart="never" nodeType="tmRoot">
+          <p:childTnLst>
+            <p:seq concurrent="1" nextAc="seek">
+              <p:cTn id="2" dur="indefinite" nodeType="mainSeq">
+                <p:childTnLst>
+                  <p:par>
+                    <p:cTn id="10" fill="hold">
+                      <p:stCondLst>
+                        <p:cond delay="indefinite"/>
+                      </p:stCondLst>
+                      <p:childTnLst>
+                        <p:par>
+                          <p:cTn id="11" fill="hold">
+                            <p:stCondLst>
+                              <p:cond delay="0"/>
+                            </p:stCondLst>
+                            <p:childTnLst>
+                              <p:par>
+                                <p:cTn id="12" presetID="10" presetClass="entr" presetSubtype="0" fill="hold" grpId="0" nodeType="clickEffect">
+                                  <p:stCondLst>
+                                    <p:cond delay="0"/>
+                                  </p:stCondLst>
+                                  <p:childTnLst>
+                                    <p:set>
+                                      <p:cBhvr>
+                                        <p:cTn id="13" dur="1" fill="hold"/>
+                                        <p:tgtEl>
+                                          <p:spTgt spid="9"/>
+                                        </p:tgtEl>
+                                        <p:attrNameLst>
+                                          <p:attrName>style.visibility</p:attrName>
+                                        </p:attrNameLst>
+                                      </p:cBhvr>
+                                      <p:to>
+                                        <p:strVal val="visible"/>
+                                      </p:to>
+                                    </p:set>
+                                    <p:animEffect transition="in" filter="fade">
+                                      <p:cBhvr>
+                                        <p:cTn id="14" dur="450"/>
+                                        <p:tgtEl>
+                                          <p:spTgt spid="9"/>
+                                        </p:tgtEl>
+                                      </p:cBhvr>
+                                    </p:animEffect>
+                                  </p:childTnLst>
+                                </p:cTn>
+                              </p:par>
+                            </p:childTnLst>
+                          </p:cTn>
+                        </p:par>
+                      </p:childTnLst>
+                    </p:cTn>
+                  </p:par>
+                  <p:par>
+                    <p:cTn id="20" fill="hold">
+                      <p:stCondLst>
+                        <p:cond delay="indefinite"/>
+                      </p:stCondLst>
+                      <p:childTnLst>
+                        <p:par>
+                          <p:cTn id="21" fill="hold">
+                            <p:stCondLst>
+                              <p:cond delay="0"/>
+                            </p:stCondLst>
+                            <p:childTnLst>
+                              <p:par>
+                                <p:cTn id="22" presetID="10" presetClass="entr" presetSubtype="0" fill="hold" grpId="0" nodeType="afterEffect">
+                                  <p:stCondLst>
+                                    <p:cond delay="0"/>
+                                  </p:stCondLst>
+                                  <p:childTnLst>
+                                    <p:set>
+                                      <p:cBhvr>
+                                        <p:cTn id="23" dur="1" fill="hold"/>
+                                        <p:tgtEl>
+                                          <p:spTgt spid="17"/>
+                                        </p:tgtEl>
+                                        <p:attrNameLst>
+                                          <p:attrName>style.visibility</p:attrName>
+                                        </p:attrNameLst>
+                                      </p:cBhvr>
+                                      <p:to>
+                                        <p:strVal val="visible"/>
+                                      </p:to>
+                                    </p:set>
+                                    <p:animEffect transition="in" filter="fade">
+                                      <p:cBhvr>
+                                        <p:cTn id="24" dur="450"/>
+                                        <p:tgtEl>
+                                          <p:spTgt spid="17"/>
+                                        </p:tgtEl>
+                                      </p:cBhvr>
+                                    </p:animEffect>
+                                  </p:childTnLst>
+                                </p:cTn>
+                              </p:par>
+                            </p:childTnLst>
+                          </p:cTn>
+                        </p:par>
+                      </p:childTnLst>
+                    </p:cTn>
+                  </p:par>
+                  <p:par>
+                    <p:cTn id="30" fill="hold">
+                      <p:stCondLst>
+                        <p:cond delay="indefinite"/>
+                      </p:stCondLst>
+                      <p:childTnLst>
+                        <p:par>
+                          <p:cTn id="31" fill="hold">
+                            <p:stCondLst>
+                              <p:cond delay="0"/>
+                            </p:stCondLst>
+                            <p:childTnLst>
+                              <p:par>
+                                <p:cTn id="32" presetID="10" presetClass="entr" presetSubtype="0" fill="hold" grpId="0" nodeType="afterEffect">
+                                  <p:stCondLst>
+                                    <p:cond delay="0"/>
+                                  </p:stCondLst>
+                                  <p:childTnLst>
+                                    <p:set>
+                                      <p:cBhvr>
+                                        <p:cTn id="33" dur="1" fill="hold"/>
+                                        <p:tgtEl>
+                                          <p:spTgt spid="23"/>
+                                        </p:tgtEl>
+                                        <p:attrNameLst>
+                                          <p:attrName>style.visibility</p:attrName>
+                                        </p:attrNameLst>
+                                      </p:cBhvr>
+                                      <p:to>
+                                        <p:strVal val="visible"/>
+                                      </p:to>
+                                    </p:set>
+                                    <p:animEffect transition="in" filter="fade">
+                                      <p:cBhvr>
+                                        <p:cTn id="34" dur="450"/>
+                                        <p:tgtEl>
+                                          <p:spTgt spid="23"/>
+                                        </p:tgtEl>
+                                      </p:cBhvr>
+                                    </p:animEffect>
+                                  </p:childTnLst>
+                                </p:cTn>
+                              </p:par>
+                            </p:childTnLst>
+                          </p:cTn>
+                        </p:par>
+                      </p:childTnLst>
+                    </p:cTn>
+                  </p:par>
+                </p:childTnLst>
+              </p:cTn>
+              <p:prevCondLst>
+                <p:cond evt="onPrev" delay="0">
+                  <p:tgtEl>
+                    <p:sldTgt/>
+                  </p:tgtEl>
+                </p:cond>
+              </p:prevCondLst>
+              <p:nextCondLst>
+                <p:cond evt="onNext" delay="0">
+                  <p:tgtEl>
+                    <p:sldTgt/>
+                  </p:tgtEl>
+                </p:cond>
+              </p:nextCondLst>
+            </p:seq>
+          </p:childTnLst>
+        </p:cTn>
+      </p:par>
+    </p:tnLst>
+  </p:timing>
+</p:sld>
+</file>
+
+<file path=ppt/slides/slide9.xml><?xml version="1.0" encoding="utf-8"?>
+<p:sld xmlns:a="http://schemas.openxmlformats.org/drawingml/2006/main" xmlns:p="http://schemas.openxmlformats.org/presentationml/2006/main" xmlns:r="http://schemas.openxmlformats.org/officeDocument/2006/relationships">
+  <p:cSld>
+    <p:spTree>
+      <p:nvGrpSpPr>
+        <p:cNvPr id="1" name=""/>
+        <p:cNvGrpSpPr/>
+        <p:nvPr/>
+      </p:nvGrpSpPr>
+      <p:grpSpPr/>
+      <p:sp>
+        <p:nvSpPr>
+          <p:cNvPr id="2" name="Rectangle 1"/>
+          <p:cNvSpPr/>
+          <p:nvPr/>
+        </p:nvSpPr>
+        <p:spPr>
+          <a:xfrm>
+            <a:off x="0" y="0"/>
+            <a:ext cx="12191695" cy="6858000"/>
+          </a:xfrm>
+          <a:prstGeom prst="rect">
+            <a:avLst/>
+          </a:prstGeom>
+          <a:solidFill>
+            <a:srgbClr val="14181F"/>
+          </a:solidFill>
+          <a:ln>
+            <a:noFill/>
+          </a:ln>
+          <a:effectLst/>
+        </p:spPr>
+        <p:style>
+          <a:lnRef idx="1">
+            <a:schemeClr val="accent1"/>
+          </a:lnRef>
+          <a:fillRef idx="3">
+            <a:schemeClr val="accent1"/>
+          </a:fillRef>
+          <a:effectRef idx="2">
+            <a:schemeClr val="accent1"/>
+          </a:effectRef>
+          <a:fontRef idx="minor">
+            <a:schemeClr val="lt1"/>
+          </a:fontRef>
+        </p:style>
+        <p:txBody>
+          <a:bodyPr rtlCol="0" anchor="ctr"/>
+          <a:lstStyle/>
+          <a:p>
+            <a:pPr algn="ctr"/>
+          </a:p>
+        </p:txBody>
+      </p:sp>
+      <p:sp>
+        <p:nvSpPr>
+          <p:cNvPr id="3" name="TextBox 2"/>
           <p:cNvSpPr txBox="1"/>
           <p:nvPr/>
         </p:nvSpPr>
         <p:spPr>
           <a:xfrm>
-            <a:off x="1005840" y="3712464"/>
+            <a:off x="1005840" y="658368"/>
+            <a:ext cx="10149840" cy="292608"/>
+          </a:xfrm>
+          <a:prstGeom prst="rect">
+            <a:avLst/>
+          </a:prstGeom>
+          <a:noFill/>
+        </p:spPr>
+        <p:txBody>
+          <a:bodyPr wrap="square">
+            <a:spAutoFit/>
+          </a:bodyPr>
+          <a:lstStyle/>
+          <a:p>
+            <a:pPr algn="l">
+              <a:lnSpc>
+                <a:spcPct val="100000"/>
+              </a:lnSpc>
+            </a:pPr>
+            <a:r>
+              <a:rPr sz="1200" b="1">
+                <a:solidFill>
+                  <a:srgbClr val="4FD1C5"/>
+                </a:solidFill>
+                <a:latin typeface="Helvetica Neue"/>
+              </a:rPr>
+              <a:t>ARCHITECTURE</a:t>
+            </a:r>
+          </a:p>
+        </p:txBody>
+      </p:sp>
+      <p:sp>
+        <p:nvSpPr>
+          <p:cNvPr id="4" name="TextBox 3"/>
+          <p:cNvSpPr txBox="1"/>
+          <p:nvPr/>
+        </p:nvSpPr>
+        <p:spPr>
+          <a:xfrm>
+            <a:off x="1005840" y="1078992"/>
+            <a:ext cx="10149840" cy="914400"/>
+          </a:xfrm>
+          <a:prstGeom prst="rect">
+            <a:avLst/>
+          </a:prstGeom>
+          <a:noFill/>
+        </p:spPr>
+        <p:txBody>
+          <a:bodyPr wrap="square">
+            <a:spAutoFit/>
+          </a:bodyPr>
+          <a:lstStyle/>
+          <a:p>
+            <a:pPr algn="l">
+              <a:lnSpc>
+                <a:spcPct val="106000"/>
+              </a:lnSpc>
+            </a:pPr>
+            <a:r>
+              <a:rPr sz="3800" b="1">
+                <a:solidFill>
+                  <a:srgbClr val="E8EDF4"/>
+                </a:solidFill>
+                <a:latin typeface="Helvetica Neue"/>
+              </a:rPr>
+              <a:t>Cloud-native, start to finish</a:t>
+            </a:r>
+          </a:p>
+        </p:txBody>
+      </p:sp>
+      <p:sp>
+        <p:nvSpPr>
+          <p:cNvPr id="5" name="Rectangle 4"/>
+          <p:cNvSpPr/>
+          <p:nvPr/>
+        </p:nvSpPr>
+        <p:spPr>
+          <a:xfrm>
+            <a:off x="1005840" y="1920239"/>
+            <a:ext cx="1463040" cy="38100"/>
+          </a:xfrm>
+          <a:prstGeom prst="rect">
+            <a:avLst/>
+          </a:prstGeom>
+          <a:solidFill>
+            <a:srgbClr val="4FD1C5"/>
+          </a:solidFill>
+          <a:ln>
+            <a:noFill/>
+          </a:ln>
+          <a:effectLst/>
+        </p:spPr>
+        <p:style>
+          <a:lnRef idx="1">
+            <a:schemeClr val="accent1"/>
+          </a:lnRef>
+          <a:fillRef idx="3">
+            <a:schemeClr val="accent1"/>
+          </a:fillRef>
+          <a:effectRef idx="2">
+            <a:schemeClr val="accent1"/>
+          </a:effectRef>
+          <a:fontRef idx="minor">
+            <a:schemeClr val="lt1"/>
+          </a:fontRef>
+        </p:style>
+        <p:txBody>
+          <a:bodyPr rtlCol="0" anchor="ctr"/>
+          <a:lstStyle/>
+          <a:p>
+            <a:pPr algn="ctr"/>
+          </a:p>
+        </p:txBody>
+      </p:sp>
+      <p:sp>
+        <p:nvSpPr>
+          <p:cNvPr id="6" name="TextBox 5"/>
+          <p:cNvSpPr txBox="1"/>
+          <p:nvPr/>
+        </p:nvSpPr>
+        <p:spPr>
+          <a:xfrm>
+            <a:off x="1005840" y="2286000"/>
             <a:ext cx="457200" cy="457200"/>
           </a:xfrm>
           <a:prstGeom prst="rect">
@@ -13043,20 +15400,20 @@
                 </a:solidFill>
                 <a:latin typeface="Helvetica Neue"/>
               </a:rPr>
-              <a:t>3</a:t>
-            </a:r>
-          </a:p>
-        </p:txBody>
-      </p:sp>
-      <p:sp>
-        <p:nvSpPr>
-          <p:cNvPr id="13" name="TextBox 12"/>
+              <a:t>1</a:t>
+            </a:r>
+          </a:p>
+        </p:txBody>
+      </p:sp>
+      <p:sp>
+        <p:nvSpPr>
+          <p:cNvPr id="7" name="TextBox 6"/>
           <p:cNvSpPr txBox="1"/>
           <p:nvPr/>
         </p:nvSpPr>
         <p:spPr>
           <a:xfrm>
-            <a:off x="1600200" y="3712464"/>
+            <a:off x="1600200" y="2286000"/>
             <a:ext cx="4023360" cy="457200"/>
           </a:xfrm>
           <a:prstGeom prst="rect">
@@ -13082,20 +15439,20 @@
                 </a:solidFill>
                 <a:latin typeface="Helvetica Neue"/>
               </a:rPr>
-              <a:t>Routed to the pipeline</a:t>
-            </a:r>
-          </a:p>
-        </p:txBody>
-      </p:sp>
-      <p:sp>
-        <p:nvSpPr>
-          <p:cNvPr id="14" name="TextBox 13"/>
+              <a:t>A ticket is opened</a:t>
+            </a:r>
+          </a:p>
+        </p:txBody>
+      </p:sp>
+      <p:sp>
+        <p:nvSpPr>
+          <p:cNvPr id="8" name="TextBox 7"/>
           <p:cNvSpPr txBox="1"/>
           <p:nvPr/>
         </p:nvSpPr>
         <p:spPr>
           <a:xfrm>
-            <a:off x="5760720" y="3712464"/>
+            <a:off x="5760720" y="2286000"/>
             <a:ext cx="5394960" cy="457200"/>
           </a:xfrm>
           <a:prstGeom prst="rect">
@@ -13121,20 +15478,20 @@
                 </a:solidFill>
                 <a:latin typeface="Helvetica Neue"/>
               </a:rPr>
-              <a:t>an event bus, with a dead-letter queue</a:t>
-            </a:r>
-          </a:p>
-        </p:txBody>
-      </p:sp>
-      <p:sp>
-        <p:nvSpPr>
-          <p:cNvPr id="15" name="TextBox 14"/>
+              <a:t>a GitHub issue — the only trigger</a:t>
+            </a:r>
+          </a:p>
+        </p:txBody>
+      </p:sp>
+      <p:sp>
+        <p:nvSpPr>
+          <p:cNvPr id="9" name="TextBox 8"/>
           <p:cNvSpPr txBox="1"/>
           <p:nvPr/>
         </p:nvSpPr>
         <p:spPr>
           <a:xfrm>
-            <a:off x="1005840" y="4425696"/>
+            <a:off x="1005840" y="2999232"/>
             <a:ext cx="457200" cy="457200"/>
           </a:xfrm>
           <a:prstGeom prst="rect">
@@ -13160,20 +15517,20 @@
                 </a:solidFill>
                 <a:latin typeface="Helvetica Neue"/>
               </a:rPr>
-              <a:t>4</a:t>
-            </a:r>
-          </a:p>
-        </p:txBody>
-      </p:sp>
-      <p:sp>
-        <p:nvSpPr>
-          <p:cNvPr id="16" name="TextBox 15"/>
+              <a:t>2</a:t>
+            </a:r>
+          </a:p>
+        </p:txBody>
+      </p:sp>
+      <p:sp>
+        <p:nvSpPr>
+          <p:cNvPr id="10" name="TextBox 9"/>
           <p:cNvSpPr txBox="1"/>
           <p:nvPr/>
         </p:nvSpPr>
         <p:spPr>
           <a:xfrm>
-            <a:off x="1600200" y="4425696"/>
+            <a:off x="1600200" y="2999232"/>
             <a:ext cx="4023360" cy="457200"/>
           </a:xfrm>
           <a:prstGeom prst="rect">
@@ -13199,20 +15556,20 @@
                 </a:solidFill>
                 <a:latin typeface="Helvetica Neue"/>
               </a:rPr>
-              <a:t>Five agents, five runtimes</a:t>
-            </a:r>
-          </a:p>
-        </p:txBody>
-      </p:sp>
-      <p:sp>
-        <p:nvSpPr>
-          <p:cNvPr id="17" name="TextBox 16"/>
+              <a:t>Signed and verified</a:t>
+            </a:r>
+          </a:p>
+        </p:txBody>
+      </p:sp>
+      <p:sp>
+        <p:nvSpPr>
+          <p:cNvPr id="11" name="TextBox 10"/>
           <p:cNvSpPr txBox="1"/>
           <p:nvPr/>
         </p:nvSpPr>
         <p:spPr>
           <a:xfrm>
-            <a:off x="5760720" y="4425696"/>
+            <a:off x="5760720" y="2999232"/>
             <a:ext cx="5394960" cy="457200"/>
           </a:xfrm>
           <a:prstGeom prst="rect">
@@ -13238,20 +15595,20 @@
                 </a:solidFill>
                 <a:latin typeface="Helvetica Neue"/>
               </a:rPr>
-              <a:t>each isolated, all from one build</a:t>
-            </a:r>
-          </a:p>
-        </p:txBody>
-      </p:sp>
-      <p:sp>
-        <p:nvSpPr>
-          <p:cNvPr id="18" name="TextBox 17"/>
+              <a:t>authenticated before anything runs</a:t>
+            </a:r>
+          </a:p>
+        </p:txBody>
+      </p:sp>
+      <p:sp>
+        <p:nvSpPr>
+          <p:cNvPr id="12" name="TextBox 11"/>
           <p:cNvSpPr txBox="1"/>
           <p:nvPr/>
         </p:nvSpPr>
         <p:spPr>
           <a:xfrm>
-            <a:off x="1005840" y="5138928"/>
+            <a:off x="1005840" y="3712464"/>
             <a:ext cx="457200" cy="457200"/>
           </a:xfrm>
           <a:prstGeom prst="rect">
@@ -13277,20 +15634,20 @@
                 </a:solidFill>
                 <a:latin typeface="Helvetica Neue"/>
               </a:rPr>
-              <a:t>5</a:t>
-            </a:r>
-          </a:p>
-        </p:txBody>
-      </p:sp>
-      <p:sp>
-        <p:nvSpPr>
-          <p:cNvPr id="19" name="TextBox 18"/>
+              <a:t>3</a:t>
+            </a:r>
+          </a:p>
+        </p:txBody>
+      </p:sp>
+      <p:sp>
+        <p:nvSpPr>
+          <p:cNvPr id="13" name="TextBox 12"/>
           <p:cNvSpPr txBox="1"/>
           <p:nvPr/>
         </p:nvSpPr>
         <p:spPr>
           <a:xfrm>
-            <a:off x="1600200" y="5138928"/>
+            <a:off x="1600200" y="3712464"/>
             <a:ext cx="4023360" cy="457200"/>
           </a:xfrm>
           <a:prstGeom prst="rect">
@@ -13316,20 +15673,20 @@
                 </a:solidFill>
                 <a:latin typeface="Helvetica Neue"/>
               </a:rPr>
-              <a:t>Three approval gates</a:t>
-            </a:r>
-          </a:p>
-        </p:txBody>
-      </p:sp>
-      <p:sp>
-        <p:nvSpPr>
-          <p:cNvPr id="20" name="TextBox 19"/>
+              <a:t>Routed to the pipeline</a:t>
+            </a:r>
+          </a:p>
+        </p:txBody>
+      </p:sp>
+      <p:sp>
+        <p:nvSpPr>
+          <p:cNvPr id="14" name="TextBox 13"/>
           <p:cNvSpPr txBox="1"/>
           <p:nvPr/>
         </p:nvSpPr>
         <p:spPr>
           <a:xfrm>
-            <a:off x="5760720" y="5138928"/>
+            <a:off x="5760720" y="3712464"/>
             <a:ext cx="5394960" cy="457200"/>
           </a:xfrm>
           <a:prstGeom prst="rect">
@@ -13355,21 +15712,21 @@
                 </a:solidFill>
                 <a:latin typeface="Helvetica Neue"/>
               </a:rPr>
-              <a:t>the run pauses until a human clicks</a:t>
-            </a:r>
-          </a:p>
-        </p:txBody>
-      </p:sp>
-      <p:sp>
-        <p:nvSpPr>
-          <p:cNvPr id="21" name="TextBox 20"/>
+              <a:t>an event bus, with a dead-letter queue</a:t>
+            </a:r>
+          </a:p>
+        </p:txBody>
+      </p:sp>
+      <p:sp>
+        <p:nvSpPr>
+          <p:cNvPr id="15" name="TextBox 14"/>
           <p:cNvSpPr txBox="1"/>
           <p:nvPr/>
         </p:nvSpPr>
         <p:spPr>
           <a:xfrm>
-            <a:off x="1005840" y="5989320"/>
-            <a:ext cx="10241280" cy="365760"/>
+            <a:off x="1005840" y="4425696"/>
+            <a:ext cx="457200" cy="457200"/>
           </a:xfrm>
           <a:prstGeom prst="rect">
             <a:avLst/>
@@ -13388,6 +15745,240 @@
               </a:lnSpc>
             </a:pPr>
             <a:r>
+              <a:rPr sz="1900" b="1">
+                <a:solidFill>
+                  <a:srgbClr val="4FD1C5"/>
+                </a:solidFill>
+                <a:latin typeface="Helvetica Neue"/>
+              </a:rPr>
+              <a:t>4</a:t>
+            </a:r>
+          </a:p>
+        </p:txBody>
+      </p:sp>
+      <p:sp>
+        <p:nvSpPr>
+          <p:cNvPr id="16" name="TextBox 15"/>
+          <p:cNvSpPr txBox="1"/>
+          <p:nvPr/>
+        </p:nvSpPr>
+        <p:spPr>
+          <a:xfrm>
+            <a:off x="1600200" y="4425696"/>
+            <a:ext cx="4023360" cy="457200"/>
+          </a:xfrm>
+          <a:prstGeom prst="rect">
+            <a:avLst/>
+          </a:prstGeom>
+          <a:noFill/>
+        </p:spPr>
+        <p:txBody>
+          <a:bodyPr wrap="square">
+            <a:spAutoFit/>
+          </a:bodyPr>
+          <a:lstStyle/>
+          <a:p>
+            <a:pPr algn="l">
+              <a:lnSpc>
+                <a:spcPct val="120000"/>
+              </a:lnSpc>
+            </a:pPr>
+            <a:r>
+              <a:rPr sz="1900" b="1">
+                <a:solidFill>
+                  <a:srgbClr val="E8EDF4"/>
+                </a:solidFill>
+                <a:latin typeface="Helvetica Neue"/>
+              </a:rPr>
+              <a:t>Five agents, five runtimes</a:t>
+            </a:r>
+          </a:p>
+        </p:txBody>
+      </p:sp>
+      <p:sp>
+        <p:nvSpPr>
+          <p:cNvPr id="17" name="TextBox 16"/>
+          <p:cNvSpPr txBox="1"/>
+          <p:nvPr/>
+        </p:nvSpPr>
+        <p:spPr>
+          <a:xfrm>
+            <a:off x="5760720" y="4425696"/>
+            <a:ext cx="5394960" cy="457200"/>
+          </a:xfrm>
+          <a:prstGeom prst="rect">
+            <a:avLst/>
+          </a:prstGeom>
+          <a:noFill/>
+        </p:spPr>
+        <p:txBody>
+          <a:bodyPr wrap="square">
+            <a:spAutoFit/>
+          </a:bodyPr>
+          <a:lstStyle/>
+          <a:p>
+            <a:pPr algn="l">
+              <a:lnSpc>
+                <a:spcPct val="120000"/>
+              </a:lnSpc>
+            </a:pPr>
+            <a:r>
+              <a:rPr sz="1700" b="0">
+                <a:solidFill>
+                  <a:srgbClr val="8A94A6"/>
+                </a:solidFill>
+                <a:latin typeface="Helvetica Neue"/>
+              </a:rPr>
+              <a:t>each isolated, all from one build</a:t>
+            </a:r>
+          </a:p>
+        </p:txBody>
+      </p:sp>
+      <p:sp>
+        <p:nvSpPr>
+          <p:cNvPr id="18" name="TextBox 17"/>
+          <p:cNvSpPr txBox="1"/>
+          <p:nvPr/>
+        </p:nvSpPr>
+        <p:spPr>
+          <a:xfrm>
+            <a:off x="1005840" y="5138928"/>
+            <a:ext cx="457200" cy="457200"/>
+          </a:xfrm>
+          <a:prstGeom prst="rect">
+            <a:avLst/>
+          </a:prstGeom>
+          <a:noFill/>
+        </p:spPr>
+        <p:txBody>
+          <a:bodyPr wrap="square">
+            <a:spAutoFit/>
+          </a:bodyPr>
+          <a:lstStyle/>
+          <a:p>
+            <a:pPr algn="l">
+              <a:lnSpc>
+                <a:spcPct val="120000"/>
+              </a:lnSpc>
+            </a:pPr>
+            <a:r>
+              <a:rPr sz="1900" b="1">
+                <a:solidFill>
+                  <a:srgbClr val="4FD1C5"/>
+                </a:solidFill>
+                <a:latin typeface="Helvetica Neue"/>
+              </a:rPr>
+              <a:t>5</a:t>
+            </a:r>
+          </a:p>
+        </p:txBody>
+      </p:sp>
+      <p:sp>
+        <p:nvSpPr>
+          <p:cNvPr id="19" name="TextBox 18"/>
+          <p:cNvSpPr txBox="1"/>
+          <p:nvPr/>
+        </p:nvSpPr>
+        <p:spPr>
+          <a:xfrm>
+            <a:off x="1600200" y="5138928"/>
+            <a:ext cx="4023360" cy="457200"/>
+          </a:xfrm>
+          <a:prstGeom prst="rect">
+            <a:avLst/>
+          </a:prstGeom>
+          <a:noFill/>
+        </p:spPr>
+        <p:txBody>
+          <a:bodyPr wrap="square">
+            <a:spAutoFit/>
+          </a:bodyPr>
+          <a:lstStyle/>
+          <a:p>
+            <a:pPr algn="l">
+              <a:lnSpc>
+                <a:spcPct val="120000"/>
+              </a:lnSpc>
+            </a:pPr>
+            <a:r>
+              <a:rPr sz="1900" b="1">
+                <a:solidFill>
+                  <a:srgbClr val="E8EDF4"/>
+                </a:solidFill>
+                <a:latin typeface="Helvetica Neue"/>
+              </a:rPr>
+              <a:t>Three approval gates</a:t>
+            </a:r>
+          </a:p>
+        </p:txBody>
+      </p:sp>
+      <p:sp>
+        <p:nvSpPr>
+          <p:cNvPr id="20" name="TextBox 19"/>
+          <p:cNvSpPr txBox="1"/>
+          <p:nvPr/>
+        </p:nvSpPr>
+        <p:spPr>
+          <a:xfrm>
+            <a:off x="5760720" y="5138928"/>
+            <a:ext cx="5394960" cy="457200"/>
+          </a:xfrm>
+          <a:prstGeom prst="rect">
+            <a:avLst/>
+          </a:prstGeom>
+          <a:noFill/>
+        </p:spPr>
+        <p:txBody>
+          <a:bodyPr wrap="square">
+            <a:spAutoFit/>
+          </a:bodyPr>
+          <a:lstStyle/>
+          <a:p>
+            <a:pPr algn="l">
+              <a:lnSpc>
+                <a:spcPct val="120000"/>
+              </a:lnSpc>
+            </a:pPr>
+            <a:r>
+              <a:rPr sz="1700" b="0">
+                <a:solidFill>
+                  <a:srgbClr val="8A94A6"/>
+                </a:solidFill>
+                <a:latin typeface="Helvetica Neue"/>
+              </a:rPr>
+              <a:t>the run pauses until a human clicks</a:t>
+            </a:r>
+          </a:p>
+        </p:txBody>
+      </p:sp>
+      <p:sp>
+        <p:nvSpPr>
+          <p:cNvPr id="21" name="TextBox 20"/>
+          <p:cNvSpPr txBox="1"/>
+          <p:nvPr/>
+        </p:nvSpPr>
+        <p:spPr>
+          <a:xfrm>
+            <a:off x="1005840" y="5989320"/>
+            <a:ext cx="10241280" cy="365760"/>
+          </a:xfrm>
+          <a:prstGeom prst="rect">
+            <a:avLst/>
+          </a:prstGeom>
+          <a:noFill/>
+        </p:spPr>
+        <p:txBody>
+          <a:bodyPr wrap="square">
+            <a:spAutoFit/>
+          </a:bodyPr>
+          <a:lstStyle/>
+          <a:p>
+            <a:pPr algn="l">
+              <a:lnSpc>
+                <a:spcPct val="120000"/>
+              </a:lnSpc>
+            </a:pPr>
+            <a:r>
               <a:rPr sz="1500" b="0">
                 <a:solidFill>
                   <a:srgbClr val="4FD1C5"/>
@@ -13433,7 +16024,7 @@
                 </a:solidFill>
                 <a:latin typeface="Helvetica Neue"/>
               </a:rPr>
-              <a:t>8</a:t>
+              <a:t>9</a:t>
             </a:r>
           </a:p>
         </p:txBody>
@@ -13687,614 +16278,6 @@
                                         <p:cTn id="54" dur="450"/>
                                         <p:tgtEl>
                                           <p:spTgt spid="19"/>
-                                        </p:tgtEl>
-                                      </p:cBhvr>
-                                    </p:animEffect>
-                                  </p:childTnLst>
-                                </p:cTn>
-                              </p:par>
-                            </p:childTnLst>
-                          </p:cTn>
-                        </p:par>
-                      </p:childTnLst>
-                    </p:cTn>
-                  </p:par>
-                </p:childTnLst>
-              </p:cTn>
-              <p:prevCondLst>
-                <p:cond evt="onPrev" delay="0">
-                  <p:tgtEl>
-                    <p:sldTgt/>
-                  </p:tgtEl>
-                </p:cond>
-              </p:prevCondLst>
-              <p:nextCondLst>
-                <p:cond evt="onNext" delay="0">
-                  <p:tgtEl>
-                    <p:sldTgt/>
-                  </p:tgtEl>
-                </p:cond>
-              </p:nextCondLst>
-            </p:seq>
-          </p:childTnLst>
-        </p:cTn>
-      </p:par>
-    </p:tnLst>
-  </p:timing>
-</p:sld>
-</file>
-
-<file path=ppt/slides/slide9.xml><?xml version="1.0" encoding="utf-8"?>
-<p:sld xmlns:a="http://schemas.openxmlformats.org/drawingml/2006/main" xmlns:p="http://schemas.openxmlformats.org/presentationml/2006/main" xmlns:r="http://schemas.openxmlformats.org/officeDocument/2006/relationships">
-  <p:cSld>
-    <p:spTree>
-      <p:nvGrpSpPr>
-        <p:cNvPr id="1" name=""/>
-        <p:cNvGrpSpPr/>
-        <p:nvPr/>
-      </p:nvGrpSpPr>
-      <p:grpSpPr/>
-      <p:sp>
-        <p:nvSpPr>
-          <p:cNvPr id="2" name="Rectangle 1"/>
-          <p:cNvSpPr/>
-          <p:nvPr/>
-        </p:nvSpPr>
-        <p:spPr>
-          <a:xfrm>
-            <a:off x="0" y="0"/>
-            <a:ext cx="12191695" cy="6858000"/>
-          </a:xfrm>
-          <a:prstGeom prst="rect">
-            <a:avLst/>
-          </a:prstGeom>
-          <a:solidFill>
-            <a:srgbClr val="14181F"/>
-          </a:solidFill>
-          <a:ln>
-            <a:noFill/>
-          </a:ln>
-          <a:effectLst/>
-        </p:spPr>
-        <p:style>
-          <a:lnRef idx="1">
-            <a:schemeClr val="accent1"/>
-          </a:lnRef>
-          <a:fillRef idx="3">
-            <a:schemeClr val="accent1"/>
-          </a:fillRef>
-          <a:effectRef idx="2">
-            <a:schemeClr val="accent1"/>
-          </a:effectRef>
-          <a:fontRef idx="minor">
-            <a:schemeClr val="lt1"/>
-          </a:fontRef>
-        </p:style>
-        <p:txBody>
-          <a:bodyPr rtlCol="0" anchor="ctr"/>
-          <a:lstStyle/>
-          <a:p>
-            <a:pPr algn="ctr"/>
-          </a:p>
-        </p:txBody>
-      </p:sp>
-      <p:sp>
-        <p:nvSpPr>
-          <p:cNvPr id="3" name="TextBox 2"/>
-          <p:cNvSpPr txBox="1"/>
-          <p:nvPr/>
-        </p:nvSpPr>
-        <p:spPr>
-          <a:xfrm>
-            <a:off x="1005840" y="658368"/>
-            <a:ext cx="10149840" cy="292608"/>
-          </a:xfrm>
-          <a:prstGeom prst="rect">
-            <a:avLst/>
-          </a:prstGeom>
-          <a:noFill/>
-        </p:spPr>
-        <p:txBody>
-          <a:bodyPr wrap="square">
-            <a:spAutoFit/>
-          </a:bodyPr>
-          <a:lstStyle/>
-          <a:p>
-            <a:pPr algn="l">
-              <a:lnSpc>
-                <a:spcPct val="100000"/>
-              </a:lnSpc>
-            </a:pPr>
-            <a:r>
-              <a:rPr sz="1200" b="1">
-                <a:solidFill>
-                  <a:srgbClr val="4FD1C5"/>
-                </a:solidFill>
-                <a:latin typeface="Helvetica Neue"/>
-              </a:rPr>
-              <a:t>ARCHITECTURE</a:t>
-            </a:r>
-          </a:p>
-        </p:txBody>
-      </p:sp>
-      <p:sp>
-        <p:nvSpPr>
-          <p:cNvPr id="4" name="TextBox 3"/>
-          <p:cNvSpPr txBox="1"/>
-          <p:nvPr/>
-        </p:nvSpPr>
-        <p:spPr>
-          <a:xfrm>
-            <a:off x="1005840" y="1078992"/>
-            <a:ext cx="10149840" cy="914400"/>
-          </a:xfrm>
-          <a:prstGeom prst="rect">
-            <a:avLst/>
-          </a:prstGeom>
-          <a:noFill/>
-        </p:spPr>
-        <p:txBody>
-          <a:bodyPr wrap="square">
-            <a:spAutoFit/>
-          </a:bodyPr>
-          <a:lstStyle/>
-          <a:p>
-            <a:pPr algn="l">
-              <a:lnSpc>
-                <a:spcPct val="106000"/>
-              </a:lnSpc>
-            </a:pPr>
-            <a:r>
-              <a:rPr sz="3800" b="1">
-                <a:solidFill>
-                  <a:srgbClr val="E8EDF4"/>
-                </a:solidFill>
-                <a:latin typeface="Helvetica Neue"/>
-              </a:rPr>
-              <a:t>The humans are not a formality</a:t>
-            </a:r>
-          </a:p>
-        </p:txBody>
-      </p:sp>
-      <p:sp>
-        <p:nvSpPr>
-          <p:cNvPr id="5" name="Rectangle 4"/>
-          <p:cNvSpPr/>
-          <p:nvPr/>
-        </p:nvSpPr>
-        <p:spPr>
-          <a:xfrm>
-            <a:off x="1005840" y="1920239"/>
-            <a:ext cx="1463040" cy="38100"/>
-          </a:xfrm>
-          <a:prstGeom prst="rect">
-            <a:avLst/>
-          </a:prstGeom>
-          <a:solidFill>
-            <a:srgbClr val="4FD1C5"/>
-          </a:solidFill>
-          <a:ln>
-            <a:noFill/>
-          </a:ln>
-          <a:effectLst/>
-        </p:spPr>
-        <p:style>
-          <a:lnRef idx="1">
-            <a:schemeClr val="accent1"/>
-          </a:lnRef>
-          <a:fillRef idx="3">
-            <a:schemeClr val="accent1"/>
-          </a:fillRef>
-          <a:effectRef idx="2">
-            <a:schemeClr val="accent1"/>
-          </a:effectRef>
-          <a:fontRef idx="minor">
-            <a:schemeClr val="lt1"/>
-          </a:fontRef>
-        </p:style>
-        <p:txBody>
-          <a:bodyPr rtlCol="0" anchor="ctr"/>
-          <a:lstStyle/>
-          <a:p>
-            <a:pPr algn="ctr"/>
-          </a:p>
-        </p:txBody>
-      </p:sp>
-      <p:sp>
-        <p:nvSpPr>
-          <p:cNvPr id="6" name="TextBox 5"/>
-          <p:cNvSpPr txBox="1"/>
-          <p:nvPr/>
-        </p:nvSpPr>
-        <p:spPr>
-          <a:xfrm>
-            <a:off x="1005840" y="2560320"/>
-            <a:ext cx="10149840" cy="914400"/>
-          </a:xfrm>
-          <a:prstGeom prst="rect">
-            <a:avLst/>
-          </a:prstGeom>
-          <a:noFill/>
-        </p:spPr>
-        <p:txBody>
-          <a:bodyPr wrap="square">
-            <a:spAutoFit/>
-          </a:bodyPr>
-          <a:lstStyle/>
-          <a:p>
-            <a:pPr algn="l">
-              <a:lnSpc>
-                <a:spcPct val="120000"/>
-              </a:lnSpc>
-            </a:pPr>
-            <a:r>
-              <a:rPr sz="2100" b="0">
-                <a:solidFill>
-                  <a:srgbClr val="E8EDF4"/>
-                </a:solidFill>
-                <a:latin typeface="Helvetica Neue"/>
-              </a:rPr>
-              <a:t>Each gate is a platform-level approval, not a step the pipeline can skip.</a:t>
-            </a:r>
-          </a:p>
-        </p:txBody>
-      </p:sp>
-      <p:sp>
-        <p:nvSpPr>
-          <p:cNvPr id="7" name="TextBox 6"/>
-          <p:cNvSpPr txBox="1"/>
-          <p:nvPr/>
-        </p:nvSpPr>
-        <p:spPr>
-          <a:xfrm>
-            <a:off x="1005840" y="3328416"/>
-            <a:ext cx="10149840" cy="914400"/>
-          </a:xfrm>
-          <a:prstGeom prst="rect">
-            <a:avLst/>
-          </a:prstGeom>
-          <a:noFill/>
-        </p:spPr>
-        <p:txBody>
-          <a:bodyPr wrap="square">
-            <a:spAutoFit/>
-          </a:bodyPr>
-          <a:lstStyle/>
-          <a:p>
-            <a:pPr algn="l">
-              <a:lnSpc>
-                <a:spcPct val="120000"/>
-              </a:lnSpc>
-            </a:pPr>
-            <a:r>
-              <a:rPr sz="2100" b="0">
-                <a:solidFill>
-                  <a:srgbClr val="E8EDF4"/>
-                </a:solidFill>
-                <a:latin typeface="Helvetica Neue"/>
-              </a:rPr>
-              <a:t>Until someone clicks, the next stage does not exist — it is never queued.</a:t>
-            </a:r>
-          </a:p>
-        </p:txBody>
-      </p:sp>
-      <p:sp>
-        <p:nvSpPr>
-          <p:cNvPr id="8" name="TextBox 7"/>
-          <p:cNvSpPr txBox="1"/>
-          <p:nvPr/>
-        </p:nvSpPr>
-        <p:spPr>
-          <a:xfrm>
-            <a:off x="1005840" y="4096512"/>
-            <a:ext cx="10149840" cy="914400"/>
-          </a:xfrm>
-          <a:prstGeom prst="rect">
-            <a:avLst/>
-          </a:prstGeom>
-          <a:noFill/>
-        </p:spPr>
-        <p:txBody>
-          <a:bodyPr wrap="square">
-            <a:spAutoFit/>
-          </a:bodyPr>
-          <a:lstStyle/>
-          <a:p>
-            <a:pPr algn="l">
-              <a:lnSpc>
-                <a:spcPct val="120000"/>
-              </a:lnSpc>
-            </a:pPr>
-            <a:r>
-              <a:rPr sz="2100" b="0">
-                <a:solidFill>
-                  <a:srgbClr val="E8EDF4"/>
-                </a:solidFill>
-                <a:latin typeface="Helvetica Neue"/>
-              </a:rPr>
-              <a:t>Refusing is recorded on the ticket: who refused, and when.</a:t>
-            </a:r>
-          </a:p>
-        </p:txBody>
-      </p:sp>
-      <p:sp>
-        <p:nvSpPr>
-          <p:cNvPr id="9" name="TextBox 8"/>
-          <p:cNvSpPr txBox="1"/>
-          <p:nvPr/>
-        </p:nvSpPr>
-        <p:spPr>
-          <a:xfrm>
-            <a:off x="1005840" y="5029200"/>
-            <a:ext cx="9784080" cy="914400"/>
-          </a:xfrm>
-          <a:prstGeom prst="rect">
-            <a:avLst/>
-          </a:prstGeom>
-          <a:noFill/>
-        </p:spPr>
-        <p:txBody>
-          <a:bodyPr wrap="square">
-            <a:spAutoFit/>
-          </a:bodyPr>
-          <a:lstStyle/>
-          <a:p>
-            <a:pPr algn="l">
-              <a:lnSpc>
-                <a:spcPct val="120000"/>
-              </a:lnSpc>
-            </a:pPr>
-            <a:r>
-              <a:rPr sz="1900" b="0">
-                <a:solidFill>
-                  <a:srgbClr val="4FD1C5"/>
-                </a:solidFill>
-                <a:latin typeface="Helvetica Neue"/>
-              </a:rPr>
-              <a:t>When the safety check stops a change, the stages after it are never created. There is no branch to take and no flag to flip — the refusal is structural.</a:t>
-            </a:r>
-          </a:p>
-        </p:txBody>
-      </p:sp>
-      <p:sp>
-        <p:nvSpPr>
-          <p:cNvPr id="45" name="TextBox 44"/>
-          <p:cNvSpPr txBox="1"/>
-          <p:nvPr/>
-        </p:nvSpPr>
-        <p:spPr>
-          <a:xfrm>
-            <a:off x="11247120" y="6272784"/>
-            <a:ext cx="548640" cy="292608"/>
-          </a:xfrm>
-          <a:prstGeom prst="rect">
-            <a:avLst/>
-          </a:prstGeom>
-          <a:noFill/>
-        </p:spPr>
-        <p:txBody>
-          <a:bodyPr wrap="square">
-            <a:spAutoFit/>
-          </a:bodyPr>
-          <a:lstStyle/>
-          <a:p>
-            <a:pPr algn="r">
-              <a:lnSpc>
-                <a:spcPct val="120000"/>
-              </a:lnSpc>
-            </a:pPr>
-            <a:r>
-              <a:rPr sz="1100" b="0">
-                <a:solidFill>
-                  <a:srgbClr val="8A94A6"/>
-                </a:solidFill>
-                <a:latin typeface="Helvetica Neue"/>
-              </a:rPr>
-              <a:t>9</a:t>
-            </a:r>
-          </a:p>
-        </p:txBody>
-      </p:sp>
-    </p:spTree>
-  </p:cSld>
-  <p:clrMapOvr>
-    <a:masterClrMapping/>
-  </p:clrMapOvr>
-  <p:transition spd="med">
-    <p:wipe dir="l"/>
-  </p:transition>
-  <p:timing>
-    <p:tnLst>
-      <p:par>
-        <p:cTn id="1" dur="indefinite" restart="never" nodeType="tmRoot">
-          <p:childTnLst>
-            <p:seq concurrent="1" nextAc="seek">
-              <p:cTn id="2" dur="indefinite" nodeType="mainSeq">
-                <p:childTnLst>
-                  <p:par>
-                    <p:cTn id="10" fill="hold">
-                      <p:stCondLst>
-                        <p:cond delay="indefinite"/>
-                      </p:stCondLst>
-                      <p:childTnLst>
-                        <p:par>
-                          <p:cTn id="11" fill="hold">
-                            <p:stCondLst>
-                              <p:cond delay="0"/>
-                            </p:stCondLst>
-                            <p:childTnLst>
-                              <p:par>
-                                <p:cTn id="12" presetID="10" presetClass="entr" presetSubtype="0" fill="hold" grpId="0" nodeType="clickEffect">
-                                  <p:stCondLst>
-                                    <p:cond delay="0"/>
-                                  </p:stCondLst>
-                                  <p:childTnLst>
-                                    <p:set>
-                                      <p:cBhvr>
-                                        <p:cTn id="13" dur="1" fill="hold"/>
-                                        <p:tgtEl>
-                                          <p:spTgt spid="6"/>
-                                        </p:tgtEl>
-                                        <p:attrNameLst>
-                                          <p:attrName>style.visibility</p:attrName>
-                                        </p:attrNameLst>
-                                      </p:cBhvr>
-                                      <p:to>
-                                        <p:strVal val="visible"/>
-                                      </p:to>
-                                    </p:set>
-                                    <p:animEffect transition="in" filter="fade">
-                                      <p:cBhvr>
-                                        <p:cTn id="14" dur="450"/>
-                                        <p:tgtEl>
-                                          <p:spTgt spid="6"/>
-                                        </p:tgtEl>
-                                      </p:cBhvr>
-                                    </p:animEffect>
-                                  </p:childTnLst>
-                                </p:cTn>
-                              </p:par>
-                            </p:childTnLst>
-                          </p:cTn>
-                        </p:par>
-                      </p:childTnLst>
-                    </p:cTn>
-                  </p:par>
-                  <p:par>
-                    <p:cTn id="20" fill="hold">
-                      <p:stCondLst>
-                        <p:cond delay="indefinite"/>
-                      </p:stCondLst>
-                      <p:childTnLst>
-                        <p:par>
-                          <p:cTn id="21" fill="hold">
-                            <p:stCondLst>
-                              <p:cond delay="0"/>
-                            </p:stCondLst>
-                            <p:childTnLst>
-                              <p:par>
-                                <p:cTn id="22" presetID="10" presetClass="entr" presetSubtype="0" fill="hold" grpId="0" nodeType="afterEffect">
-                                  <p:stCondLst>
-                                    <p:cond delay="0"/>
-                                  </p:stCondLst>
-                                  <p:childTnLst>
-                                    <p:set>
-                                      <p:cBhvr>
-                                        <p:cTn id="23" dur="1" fill="hold"/>
-                                        <p:tgtEl>
-                                          <p:spTgt spid="7"/>
-                                        </p:tgtEl>
-                                        <p:attrNameLst>
-                                          <p:attrName>style.visibility</p:attrName>
-                                        </p:attrNameLst>
-                                      </p:cBhvr>
-                                      <p:to>
-                                        <p:strVal val="visible"/>
-                                      </p:to>
-                                    </p:set>
-                                    <p:animEffect transition="in" filter="fade">
-                                      <p:cBhvr>
-                                        <p:cTn id="24" dur="450"/>
-                                        <p:tgtEl>
-                                          <p:spTgt spid="7"/>
-                                        </p:tgtEl>
-                                      </p:cBhvr>
-                                    </p:animEffect>
-                                  </p:childTnLst>
-                                </p:cTn>
-                              </p:par>
-                            </p:childTnLst>
-                          </p:cTn>
-                        </p:par>
-                      </p:childTnLst>
-                    </p:cTn>
-                  </p:par>
-                  <p:par>
-                    <p:cTn id="30" fill="hold">
-                      <p:stCondLst>
-                        <p:cond delay="indefinite"/>
-                      </p:stCondLst>
-                      <p:childTnLst>
-                        <p:par>
-                          <p:cTn id="31" fill="hold">
-                            <p:stCondLst>
-                              <p:cond delay="0"/>
-                            </p:stCondLst>
-                            <p:childTnLst>
-                              <p:par>
-                                <p:cTn id="32" presetID="10" presetClass="entr" presetSubtype="0" fill="hold" grpId="0" nodeType="afterEffect">
-                                  <p:stCondLst>
-                                    <p:cond delay="0"/>
-                                  </p:stCondLst>
-                                  <p:childTnLst>
-                                    <p:set>
-                                      <p:cBhvr>
-                                        <p:cTn id="33" dur="1" fill="hold"/>
-                                        <p:tgtEl>
-                                          <p:spTgt spid="8"/>
-                                        </p:tgtEl>
-                                        <p:attrNameLst>
-                                          <p:attrName>style.visibility</p:attrName>
-                                        </p:attrNameLst>
-                                      </p:cBhvr>
-                                      <p:to>
-                                        <p:strVal val="visible"/>
-                                      </p:to>
-                                    </p:set>
-                                    <p:animEffect transition="in" filter="fade">
-                                      <p:cBhvr>
-                                        <p:cTn id="34" dur="450"/>
-                                        <p:tgtEl>
-                                          <p:spTgt spid="8"/>
-                                        </p:tgtEl>
-                                      </p:cBhvr>
-                                    </p:animEffect>
-                                  </p:childTnLst>
-                                </p:cTn>
-                              </p:par>
-                            </p:childTnLst>
-                          </p:cTn>
-                        </p:par>
-                      </p:childTnLst>
-                    </p:cTn>
-                  </p:par>
-                  <p:par>
-                    <p:cTn id="40" fill="hold">
-                      <p:stCondLst>
-                        <p:cond delay="indefinite"/>
-                      </p:stCondLst>
-                      <p:childTnLst>
-                        <p:par>
-                          <p:cTn id="41" fill="hold">
-                            <p:stCondLst>
-                              <p:cond delay="0"/>
-                            </p:stCondLst>
-                            <p:childTnLst>
-                              <p:par>
-                                <p:cTn id="42" presetID="10" presetClass="entr" presetSubtype="0" fill="hold" grpId="0" nodeType="afterEffect">
-                                  <p:stCondLst>
-                                    <p:cond delay="0"/>
-                                  </p:stCondLst>
-                                  <p:childTnLst>
-                                    <p:set>
-                                      <p:cBhvr>
-                                        <p:cTn id="43" dur="1" fill="hold"/>
-                                        <p:tgtEl>
-                                          <p:spTgt spid="9"/>
-                                        </p:tgtEl>
-                                        <p:attrNameLst>
-                                          <p:attrName>style.visibility</p:attrName>
-                                        </p:attrNameLst>
-                                      </p:cBhvr>
-                                      <p:to>
-                                        <p:strVal val="visible"/>
-                                      </p:to>
-                                    </p:set>
-                                    <p:animEffect transition="in" filter="fade">
-                                      <p:cBhvr>
-                                        <p:cTn id="44" dur="450"/>
-                                        <p:tgtEl>
-                                          <p:spTgt spid="9"/>
                                         </p:tgtEl>
                                       </p:cBhvr>
                                     </p:animEffect>
